--- a/Presentation/Rahul_Pharma_BA_Project_PPT 1.pptx
+++ b/Presentation/Rahul_Pharma_BA_Project_PPT 1.pptx
@@ -5,7 +5,7 @@
     <p:sldMasterId id="2147483648" r:id="rId1"/>
   </p:sldMasterIdLst>
   <p:notesMasterIdLst>
-    <p:notesMasterId r:id="rId18"/>
+    <p:notesMasterId r:id="rId20"/>
   </p:notesMasterIdLst>
   <p:sldIdLst>
     <p:sldId id="256" r:id="rId2"/>
@@ -19,11 +19,13 @@
     <p:sldId id="264" r:id="rId10"/>
     <p:sldId id="265" r:id="rId11"/>
     <p:sldId id="266" r:id="rId12"/>
-    <p:sldId id="267" r:id="rId13"/>
-    <p:sldId id="268" r:id="rId14"/>
-    <p:sldId id="269" r:id="rId15"/>
-    <p:sldId id="270" r:id="rId16"/>
-    <p:sldId id="271" r:id="rId17"/>
+    <p:sldId id="273" r:id="rId13"/>
+    <p:sldId id="267" r:id="rId14"/>
+    <p:sldId id="268" r:id="rId15"/>
+    <p:sldId id="269" r:id="rId16"/>
+    <p:sldId id="270" r:id="rId17"/>
+    <p:sldId id="274" r:id="rId18"/>
+    <p:sldId id="271" r:id="rId19"/>
   </p:sldIdLst>
   <p:sldSz cx="12192000" cy="6858000"/>
   <p:notesSz cx="6858000" cy="12192000"/>
@@ -799,7 +801,13 @@
   <p:cSld>
     <p:spTree>
       <p:nvGrpSpPr>
-        <p:cNvPr id="1" name=""/>
+        <p:cNvPr id="1" name="">
+          <a:extLst>
+            <a:ext uri="{FF2B5EF4-FFF2-40B4-BE49-F238E27FC236}">
+              <a16:creationId xmlns:a16="http://schemas.microsoft.com/office/drawing/2014/main" id="{514E72AC-262A-DA33-B3C3-CD1DE646951C}"/>
+            </a:ext>
+          </a:extLst>
+        </p:cNvPr>
         <p:cNvGrpSpPr/>
         <p:nvPr/>
       </p:nvGrpSpPr>
@@ -813,7 +821,13 @@
       </p:grpSpPr>
       <p:sp>
         <p:nvSpPr>
-          <p:cNvPr id="2" name="Slide Image Placeholder 1"/>
+          <p:cNvPr id="2" name="Slide Image Placeholder 1">
+            <a:extLst>
+              <a:ext uri="{FF2B5EF4-FFF2-40B4-BE49-F238E27FC236}">
+                <a16:creationId xmlns:a16="http://schemas.microsoft.com/office/drawing/2014/main" id="{A5B30EF0-37C2-0638-A315-809EC32C1FD3}"/>
+              </a:ext>
+            </a:extLst>
+          </p:cNvPr>
           <p:cNvSpPr>
             <a:spLocks noGrp="1" noRot="1" noChangeAspect="1"/>
           </p:cNvSpPr>
@@ -825,7 +839,13 @@
       </p:sp>
       <p:sp>
         <p:nvSpPr>
-          <p:cNvPr id="3" name="Notes Placeholder 2"/>
+          <p:cNvPr id="3" name="Notes Placeholder 2">
+            <a:extLst>
+              <a:ext uri="{FF2B5EF4-FFF2-40B4-BE49-F238E27FC236}">
+                <a16:creationId xmlns:a16="http://schemas.microsoft.com/office/drawing/2014/main" id="{E4F3B6F8-F3B5-45F7-5931-D1BCE8360FC6}"/>
+              </a:ext>
+            </a:extLst>
+          </p:cNvPr>
           <p:cNvSpPr>
             <a:spLocks noGrp="1"/>
           </p:cNvSpPr>
@@ -844,7 +864,13 @@
       </p:sp>
       <p:sp>
         <p:nvSpPr>
-          <p:cNvPr id="4" name="Slide Number Placeholder 3"/>
+          <p:cNvPr id="4" name="Slide Number Placeholder 3">
+            <a:extLst>
+              <a:ext uri="{FF2B5EF4-FFF2-40B4-BE49-F238E27FC236}">
+                <a16:creationId xmlns:a16="http://schemas.microsoft.com/office/drawing/2014/main" id="{59694990-7F80-8965-9CA9-C6B50F01E589}"/>
+              </a:ext>
+            </a:extLst>
+          </p:cNvPr>
           <p:cNvSpPr>
             <a:spLocks noGrp="1"/>
           </p:cNvSpPr>
@@ -868,7 +894,7 @@
     </p:spTree>
     <p:extLst>
       <p:ext uri="{BB962C8B-B14F-4D97-AF65-F5344CB8AC3E}">
-        <p14:creationId xmlns:p14="http://schemas.microsoft.com/office/powerpoint/2010/main" val="1024086991"/>
+        <p14:creationId xmlns:p14="http://schemas.microsoft.com/office/powerpoint/2010/main" val="3834942498"/>
       </p:ext>
     </p:extLst>
   </p:cSld>
@@ -1196,6 +1222,198 @@
             <a:fld id="{F7021451-1387-4CA6-816F-3879F97B5CBC}" type="slidenum">
               <a:rPr lang="en-US"/>
               <a:t>16</a:t>
+            </a:fld>
+            <a:endParaRPr lang="en-US"/>
+          </a:p>
+        </p:txBody>
+      </p:sp>
+    </p:spTree>
+    <p:extLst>
+      <p:ext uri="{BB962C8B-B14F-4D97-AF65-F5344CB8AC3E}">
+        <p14:creationId xmlns:p14="http://schemas.microsoft.com/office/powerpoint/2010/main" val="1024086991"/>
+      </p:ext>
+    </p:extLst>
+  </p:cSld>
+  <p:clrMapOvr>
+    <a:masterClrMapping/>
+  </p:clrMapOvr>
+</p:notes>
+</file>
+
+<file path=ppt/notesSlides/notesSlide17.xml><?xml version="1.0" encoding="utf-8"?>
+<p:notes xmlns:a="http://schemas.openxmlformats.org/drawingml/2006/main" xmlns:r="http://schemas.openxmlformats.org/officeDocument/2006/relationships" xmlns:p="http://schemas.openxmlformats.org/presentationml/2006/main">
+  <p:cSld>
+    <p:spTree>
+      <p:nvGrpSpPr>
+        <p:cNvPr id="1" name="">
+          <a:extLst>
+            <a:ext uri="{FF2B5EF4-FFF2-40B4-BE49-F238E27FC236}">
+              <a16:creationId xmlns:a16="http://schemas.microsoft.com/office/drawing/2014/main" id="{8A06D724-CEE3-D1C2-26BD-4F7986F1AD9E}"/>
+            </a:ext>
+          </a:extLst>
+        </p:cNvPr>
+        <p:cNvGrpSpPr/>
+        <p:nvPr/>
+      </p:nvGrpSpPr>
+      <p:grpSpPr>
+        <a:xfrm>
+          <a:off x="0" y="0"/>
+          <a:ext cx="0" cy="0"/>
+          <a:chOff x="0" y="0"/>
+          <a:chExt cx="0" cy="0"/>
+        </a:xfrm>
+      </p:grpSpPr>
+      <p:sp>
+        <p:nvSpPr>
+          <p:cNvPr id="2" name="Slide Image Placeholder 1">
+            <a:extLst>
+              <a:ext uri="{FF2B5EF4-FFF2-40B4-BE49-F238E27FC236}">
+                <a16:creationId xmlns:a16="http://schemas.microsoft.com/office/drawing/2014/main" id="{AD5251FF-8DCC-F203-7D21-D6D748A6034D}"/>
+              </a:ext>
+            </a:extLst>
+          </p:cNvPr>
+          <p:cNvSpPr>
+            <a:spLocks noGrp="1" noRot="1" noChangeAspect="1"/>
+          </p:cNvSpPr>
+          <p:nvPr>
+            <p:ph type="sldImg"/>
+          </p:nvPr>
+        </p:nvSpPr>
+        <p:spPr/>
+      </p:sp>
+      <p:sp>
+        <p:nvSpPr>
+          <p:cNvPr id="3" name="Notes Placeholder 2">
+            <a:extLst>
+              <a:ext uri="{FF2B5EF4-FFF2-40B4-BE49-F238E27FC236}">
+                <a16:creationId xmlns:a16="http://schemas.microsoft.com/office/drawing/2014/main" id="{D37BF86D-C169-6F60-9E96-69F41BB2020F}"/>
+              </a:ext>
+            </a:extLst>
+          </p:cNvPr>
+          <p:cNvSpPr>
+            <a:spLocks noGrp="1"/>
+          </p:cNvSpPr>
+          <p:nvPr>
+            <p:ph type="body" idx="1"/>
+          </p:nvPr>
+        </p:nvSpPr>
+        <p:spPr/>
+        <p:txBody>
+          <a:bodyPr/>
+          <a:lstStyle/>
+          <a:p>
+            <a:endParaRPr lang="en-US" dirty="0"/>
+          </a:p>
+        </p:txBody>
+      </p:sp>
+      <p:sp>
+        <p:nvSpPr>
+          <p:cNvPr id="4" name="Slide Number Placeholder 3">
+            <a:extLst>
+              <a:ext uri="{FF2B5EF4-FFF2-40B4-BE49-F238E27FC236}">
+                <a16:creationId xmlns:a16="http://schemas.microsoft.com/office/drawing/2014/main" id="{D6CFBB6F-3205-0C3E-5307-0D2C59C7559C}"/>
+              </a:ext>
+            </a:extLst>
+          </p:cNvPr>
+          <p:cNvSpPr>
+            <a:spLocks noGrp="1"/>
+          </p:cNvSpPr>
+          <p:nvPr>
+            <p:ph type="sldNum" sz="quarter" idx="10"/>
+          </p:nvPr>
+        </p:nvSpPr>
+        <p:spPr/>
+        <p:txBody>
+          <a:bodyPr/>
+          <a:lstStyle/>
+          <a:p>
+            <a:fld id="{F7021451-1387-4CA6-816F-3879F97B5CBC}" type="slidenum">
+              <a:rPr lang="en-US"/>
+              <a:t>17</a:t>
+            </a:fld>
+            <a:endParaRPr lang="en-US"/>
+          </a:p>
+        </p:txBody>
+      </p:sp>
+    </p:spTree>
+    <p:extLst>
+      <p:ext uri="{BB962C8B-B14F-4D97-AF65-F5344CB8AC3E}">
+        <p14:creationId xmlns:p14="http://schemas.microsoft.com/office/powerpoint/2010/main" val="1360751976"/>
+      </p:ext>
+    </p:extLst>
+  </p:cSld>
+  <p:clrMapOvr>
+    <a:masterClrMapping/>
+  </p:clrMapOvr>
+</p:notes>
+</file>
+
+<file path=ppt/notesSlides/notesSlide18.xml><?xml version="1.0" encoding="utf-8"?>
+<p:notes xmlns:a="http://schemas.openxmlformats.org/drawingml/2006/main" xmlns:r="http://schemas.openxmlformats.org/officeDocument/2006/relationships" xmlns:p="http://schemas.openxmlformats.org/presentationml/2006/main">
+  <p:cSld>
+    <p:spTree>
+      <p:nvGrpSpPr>
+        <p:cNvPr id="1" name=""/>
+        <p:cNvGrpSpPr/>
+        <p:nvPr/>
+      </p:nvGrpSpPr>
+      <p:grpSpPr>
+        <a:xfrm>
+          <a:off x="0" y="0"/>
+          <a:ext cx="0" cy="0"/>
+          <a:chOff x="0" y="0"/>
+          <a:chExt cx="0" cy="0"/>
+        </a:xfrm>
+      </p:grpSpPr>
+      <p:sp>
+        <p:nvSpPr>
+          <p:cNvPr id="2" name="Slide Image Placeholder 1"/>
+          <p:cNvSpPr>
+            <a:spLocks noGrp="1" noRot="1" noChangeAspect="1"/>
+          </p:cNvSpPr>
+          <p:nvPr>
+            <p:ph type="sldImg"/>
+          </p:nvPr>
+        </p:nvSpPr>
+        <p:spPr/>
+      </p:sp>
+      <p:sp>
+        <p:nvSpPr>
+          <p:cNvPr id="3" name="Notes Placeholder 2"/>
+          <p:cNvSpPr>
+            <a:spLocks noGrp="1"/>
+          </p:cNvSpPr>
+          <p:nvPr>
+            <p:ph type="body" idx="1"/>
+          </p:nvPr>
+        </p:nvSpPr>
+        <p:spPr/>
+        <p:txBody>
+          <a:bodyPr/>
+          <a:lstStyle/>
+          <a:p>
+            <a:endParaRPr lang="en-US" dirty="0"/>
+          </a:p>
+        </p:txBody>
+      </p:sp>
+      <p:sp>
+        <p:nvSpPr>
+          <p:cNvPr id="4" name="Slide Number Placeholder 3"/>
+          <p:cNvSpPr>
+            <a:spLocks noGrp="1"/>
+          </p:cNvSpPr>
+          <p:nvPr>
+            <p:ph type="sldNum" sz="quarter" idx="10"/>
+          </p:nvPr>
+        </p:nvSpPr>
+        <p:spPr/>
+        <p:txBody>
+          <a:bodyPr/>
+          <a:lstStyle/>
+          <a:p>
+            <a:fld id="{F7021451-1387-4CA6-816F-3879F97B5CBC}" type="slidenum">
+              <a:rPr lang="en-US"/>
+              <a:t>18</a:t>
             </a:fld>
             <a:endParaRPr lang="en-US"/>
           </a:p>
@@ -3169,12 +3387,55 @@
           </a:p>
         </p:txBody>
       </p:sp>
+      <p:sp>
+        <p:nvSpPr>
+          <p:cNvPr id="8" name="TextBox 7">
+            <a:extLst>
+              <a:ext uri="{FF2B5EF4-FFF2-40B4-BE49-F238E27FC236}">
+                <a16:creationId xmlns:a16="http://schemas.microsoft.com/office/drawing/2014/main" id="{2D81A7F2-85A5-8748-ED52-81FD3DC61ECB}"/>
+              </a:ext>
+            </a:extLst>
+          </p:cNvPr>
+          <p:cNvSpPr txBox="1"/>
+          <p:nvPr/>
+        </p:nvSpPr>
+        <p:spPr>
+          <a:xfrm>
+            <a:off x="277368" y="594360"/>
+            <a:ext cx="8866632" cy="369332"/>
+          </a:xfrm>
+          <a:prstGeom prst="rect">
+            <a:avLst/>
+          </a:prstGeom>
+          <a:noFill/>
+        </p:spPr>
+        <p:txBody>
+          <a:bodyPr wrap="square">
+            <a:spAutoFit/>
+          </a:bodyPr>
+          <a:lstStyle/>
+          <a:p>
+            <a:r>
+              <a:rPr lang="en-US" b="1" dirty="0">
+                <a:solidFill>
+                  <a:srgbClr val="0B2545"/>
+                </a:solidFill>
+                <a:latin typeface="Cambria" pitchFamily="34" charset="0"/>
+                <a:ea typeface="Cambria" pitchFamily="34" charset="-122"/>
+                <a:cs typeface="Cambria" pitchFamily="34" charset="-120"/>
+              </a:rPr>
+              <a:t>   Operation Dashboard</a:t>
+            </a:r>
+            <a:endParaRPr lang="en-US" dirty="0"/>
+          </a:p>
+        </p:txBody>
+      </p:sp>
       <p:pic>
         <p:nvPicPr>
-          <p:cNvPr id="31" name="Picture 30">
+          <p:cNvPr id="10" name="Picture 9">
             <a:extLst>
               <a:ext uri="{FF2B5EF4-FFF2-40B4-BE49-F238E27FC236}">
-                <a16:creationId xmlns:a16="http://schemas.microsoft.com/office/drawing/2014/main" id="{23544A96-58C5-27B0-A386-686D5E5A367E}"/>
+                <a16:creationId xmlns:a16="http://schemas.microsoft.com/office/drawing/2014/main" id="{0F1E7C1D-9E1C-D603-D0A5-CA0992673539}"/>
               </a:ext>
             </a:extLst>
           </p:cNvPr>
@@ -3191,8 +3452,8 @@
         </p:blipFill>
         <p:spPr>
           <a:xfrm>
-            <a:off x="548640" y="734291"/>
-            <a:ext cx="11000232" cy="5895109"/>
+            <a:off x="548640" y="1061706"/>
+            <a:ext cx="10989603" cy="5476253"/>
           </a:xfrm>
           <a:prstGeom prst="rect">
             <a:avLst/>
@@ -3436,10 +3697,10 @@
       </p:sp>
       <p:pic>
         <p:nvPicPr>
-          <p:cNvPr id="30" name="Picture 29">
+          <p:cNvPr id="5" name="Picture 4">
             <a:extLst>
               <a:ext uri="{FF2B5EF4-FFF2-40B4-BE49-F238E27FC236}">
-                <a16:creationId xmlns:a16="http://schemas.microsoft.com/office/drawing/2014/main" id="{DE7BABE4-08CF-EEAE-C73B-2A975545509D}"/>
+                <a16:creationId xmlns:a16="http://schemas.microsoft.com/office/drawing/2014/main" id="{4B7E88D4-38D8-0DBC-35CB-9DAD858681E4}"/>
               </a:ext>
             </a:extLst>
           </p:cNvPr>
@@ -3456,8 +3717,8 @@
         </p:blipFill>
         <p:spPr>
           <a:xfrm>
-            <a:off x="1022888" y="1193622"/>
-            <a:ext cx="10346152" cy="5097450"/>
+            <a:off x="687462" y="1408176"/>
+            <a:ext cx="10479302" cy="5129784"/>
           </a:xfrm>
           <a:prstGeom prst="rect">
             <a:avLst/>
@@ -3473,6 +3734,1132 @@
 </file>
 
 <file path=ppt/slides/slide12.xml><?xml version="1.0" encoding="utf-8"?>
+<p:sld xmlns:a="http://schemas.openxmlformats.org/drawingml/2006/main" xmlns:r="http://schemas.openxmlformats.org/officeDocument/2006/relationships" xmlns:p="http://schemas.openxmlformats.org/presentationml/2006/main">
+  <p:cSld>
+    <p:spTree>
+      <p:nvGrpSpPr>
+        <p:cNvPr id="1" name="">
+          <a:extLst>
+            <a:ext uri="{FF2B5EF4-FFF2-40B4-BE49-F238E27FC236}">
+              <a16:creationId xmlns:a16="http://schemas.microsoft.com/office/drawing/2014/main" id="{8333FEE1-E245-8AFD-8B4E-DBE12F46484D}"/>
+            </a:ext>
+          </a:extLst>
+        </p:cNvPr>
+        <p:cNvGrpSpPr/>
+        <p:nvPr/>
+      </p:nvGrpSpPr>
+      <p:grpSpPr>
+        <a:xfrm>
+          <a:off x="0" y="0"/>
+          <a:ext cx="0" cy="0"/>
+          <a:chOff x="0" y="0"/>
+          <a:chExt cx="0" cy="0"/>
+        </a:xfrm>
+      </p:grpSpPr>
+      <p:sp>
+        <p:nvSpPr>
+          <p:cNvPr id="2" name="Text 0">
+            <a:extLst>
+              <a:ext uri="{FF2B5EF4-FFF2-40B4-BE49-F238E27FC236}">
+                <a16:creationId xmlns:a16="http://schemas.microsoft.com/office/drawing/2014/main" id="{3A708D8F-DC28-61E0-8631-0CE51F0D4D67}"/>
+              </a:ext>
+            </a:extLst>
+          </p:cNvPr>
+          <p:cNvSpPr/>
+          <p:nvPr/>
+        </p:nvSpPr>
+        <p:spPr>
+          <a:xfrm>
+            <a:off x="548640" y="320040"/>
+            <a:ext cx="7315200" cy="274320"/>
+          </a:xfrm>
+          <a:prstGeom prst="rect">
+            <a:avLst/>
+          </a:prstGeom>
+          <a:noFill/>
+          <a:ln/>
+        </p:spPr>
+        <p:txBody>
+          <a:bodyPr wrap="square" lIns="0" tIns="0" rIns="0" bIns="0" rtlCol="0" anchor="ctr"/>
+          <a:lstStyle/>
+          <a:p>
+            <a:pPr marL="0" indent="0">
+              <a:buNone/>
+            </a:pPr>
+            <a:r>
+              <a:rPr lang="en-US" sz="1200" b="1" kern="0" spc="200" dirty="0">
+                <a:solidFill>
+                  <a:srgbClr val="1C7293"/>
+                </a:solidFill>
+                <a:latin typeface="Calibri" pitchFamily="34" charset="0"/>
+                <a:ea typeface="Calibri" pitchFamily="34" charset="-122"/>
+                <a:cs typeface="Calibri" pitchFamily="34" charset="-120"/>
+              </a:rPr>
+              <a:t>Business Findings</a:t>
+            </a:r>
+            <a:endParaRPr lang="en-US" sz="1200" dirty="0"/>
+          </a:p>
+        </p:txBody>
+      </p:sp>
+      <p:sp>
+        <p:nvSpPr>
+          <p:cNvPr id="3" name="Text 1">
+            <a:extLst>
+              <a:ext uri="{FF2B5EF4-FFF2-40B4-BE49-F238E27FC236}">
+                <a16:creationId xmlns:a16="http://schemas.microsoft.com/office/drawing/2014/main" id="{8C9B49F4-4458-450B-911F-80398FC7F695}"/>
+              </a:ext>
+            </a:extLst>
+          </p:cNvPr>
+          <p:cNvSpPr/>
+          <p:nvPr/>
+        </p:nvSpPr>
+        <p:spPr>
+          <a:xfrm>
+            <a:off x="548640" y="566928"/>
+            <a:ext cx="10058400" cy="594360"/>
+          </a:xfrm>
+          <a:prstGeom prst="rect">
+            <a:avLst/>
+          </a:prstGeom>
+          <a:noFill/>
+          <a:ln/>
+        </p:spPr>
+        <p:txBody>
+          <a:bodyPr wrap="square" lIns="0" tIns="0" rIns="0" bIns="0" rtlCol="0" anchor="ctr"/>
+          <a:lstStyle/>
+          <a:p>
+            <a:pPr marL="0" indent="0">
+              <a:buNone/>
+            </a:pPr>
+            <a:r>
+              <a:rPr lang="en-US" sz="3000" b="1" dirty="0">
+                <a:solidFill>
+                  <a:srgbClr val="0B2545"/>
+                </a:solidFill>
+                <a:latin typeface="Cambria" pitchFamily="34" charset="0"/>
+                <a:ea typeface="Cambria" pitchFamily="34" charset="-122"/>
+              </a:rPr>
+              <a:t>Top 5 Business Finding</a:t>
+            </a:r>
+            <a:endParaRPr lang="en-US" sz="3000" dirty="0"/>
+          </a:p>
+        </p:txBody>
+      </p:sp>
+      <p:sp>
+        <p:nvSpPr>
+          <p:cNvPr id="6" name="Text 3">
+            <a:extLst>
+              <a:ext uri="{FF2B5EF4-FFF2-40B4-BE49-F238E27FC236}">
+                <a16:creationId xmlns:a16="http://schemas.microsoft.com/office/drawing/2014/main" id="{03C7112F-5FD9-4233-B5B0-966B218B8812}"/>
+              </a:ext>
+            </a:extLst>
+          </p:cNvPr>
+          <p:cNvSpPr/>
+          <p:nvPr/>
+        </p:nvSpPr>
+        <p:spPr>
+          <a:xfrm>
+            <a:off x="1078992" y="1554480"/>
+            <a:ext cx="4709160" cy="320040"/>
+          </a:xfrm>
+          <a:prstGeom prst="rect">
+            <a:avLst/>
+          </a:prstGeom>
+          <a:noFill/>
+          <a:ln/>
+        </p:spPr>
+        <p:txBody>
+          <a:bodyPr wrap="square" lIns="0" tIns="0" rIns="0" bIns="0" rtlCol="0" anchor="ctr"/>
+          <a:lstStyle/>
+          <a:p>
+            <a:pPr marL="0" indent="0">
+              <a:buNone/>
+            </a:pPr>
+            <a:endParaRPr lang="en-US" sz="1400" dirty="0"/>
+          </a:p>
+        </p:txBody>
+      </p:sp>
+      <p:sp>
+        <p:nvSpPr>
+          <p:cNvPr id="14" name="Text 10">
+            <a:extLst>
+              <a:ext uri="{FF2B5EF4-FFF2-40B4-BE49-F238E27FC236}">
+                <a16:creationId xmlns:a16="http://schemas.microsoft.com/office/drawing/2014/main" id="{8AE3BCAE-7A45-8A81-D71A-ED0EE84D1A1C}"/>
+              </a:ext>
+            </a:extLst>
+          </p:cNvPr>
+          <p:cNvSpPr/>
+          <p:nvPr/>
+        </p:nvSpPr>
+        <p:spPr>
+          <a:xfrm>
+            <a:off x="6510528" y="1984248"/>
+            <a:ext cx="4855464" cy="1005840"/>
+          </a:xfrm>
+          <a:prstGeom prst="rect">
+            <a:avLst/>
+          </a:prstGeom>
+          <a:noFill/>
+          <a:ln/>
+        </p:spPr>
+        <p:txBody>
+          <a:bodyPr wrap="square" lIns="0" tIns="0" rIns="0" bIns="0" rtlCol="0" anchor="t"/>
+          <a:lstStyle/>
+          <a:p>
+            <a:pPr marL="0" indent="0">
+              <a:lnSpc>
+                <a:spcPct val="105000"/>
+              </a:lnSpc>
+              <a:buNone/>
+            </a:pPr>
+            <a:endParaRPr lang="en-US" sz="950" dirty="0"/>
+          </a:p>
+        </p:txBody>
+      </p:sp>
+      <p:sp>
+        <p:nvSpPr>
+          <p:cNvPr id="18" name="Text 13">
+            <a:extLst>
+              <a:ext uri="{FF2B5EF4-FFF2-40B4-BE49-F238E27FC236}">
+                <a16:creationId xmlns:a16="http://schemas.microsoft.com/office/drawing/2014/main" id="{DFFE36B2-7E83-A645-DFCC-3FA8332555A6}"/>
+              </a:ext>
+            </a:extLst>
+          </p:cNvPr>
+          <p:cNvSpPr/>
+          <p:nvPr/>
+        </p:nvSpPr>
+        <p:spPr>
+          <a:xfrm>
+            <a:off x="1078992" y="3904488"/>
+            <a:ext cx="4709160" cy="320040"/>
+          </a:xfrm>
+          <a:prstGeom prst="rect">
+            <a:avLst/>
+          </a:prstGeom>
+          <a:noFill/>
+          <a:ln/>
+        </p:spPr>
+        <p:txBody>
+          <a:bodyPr wrap="square" lIns="0" tIns="0" rIns="0" bIns="0" rtlCol="0" anchor="ctr"/>
+          <a:lstStyle/>
+          <a:p>
+            <a:endParaRPr lang="en-US" sz="1400" dirty="0"/>
+          </a:p>
+        </p:txBody>
+      </p:sp>
+      <p:sp>
+        <p:nvSpPr>
+          <p:cNvPr id="20" name="Text 15">
+            <a:extLst>
+              <a:ext uri="{FF2B5EF4-FFF2-40B4-BE49-F238E27FC236}">
+                <a16:creationId xmlns:a16="http://schemas.microsoft.com/office/drawing/2014/main" id="{42A531E2-B0C7-09F4-8F6C-57147F02E10A}"/>
+              </a:ext>
+            </a:extLst>
+          </p:cNvPr>
+          <p:cNvSpPr/>
+          <p:nvPr/>
+        </p:nvSpPr>
+        <p:spPr>
+          <a:xfrm>
+            <a:off x="783336" y="4300451"/>
+            <a:ext cx="4855464" cy="1298447"/>
+          </a:xfrm>
+          <a:prstGeom prst="rect">
+            <a:avLst/>
+          </a:prstGeom>
+          <a:noFill/>
+          <a:ln/>
+        </p:spPr>
+        <p:txBody>
+          <a:bodyPr wrap="square" lIns="0" tIns="0" rIns="0" bIns="0" rtlCol="0" anchor="t"/>
+          <a:lstStyle/>
+          <a:p>
+            <a:pPr>
+              <a:lnSpc>
+                <a:spcPct val="105000"/>
+              </a:lnSpc>
+            </a:pPr>
+            <a:endParaRPr lang="en-US" sz="950" dirty="0"/>
+          </a:p>
+        </p:txBody>
+      </p:sp>
+      <p:sp>
+        <p:nvSpPr>
+          <p:cNvPr id="24" name="Text 18">
+            <a:extLst>
+              <a:ext uri="{FF2B5EF4-FFF2-40B4-BE49-F238E27FC236}">
+                <a16:creationId xmlns:a16="http://schemas.microsoft.com/office/drawing/2014/main" id="{5A1AF803-7B7F-BEA5-66CD-3A45A4508CA0}"/>
+              </a:ext>
+            </a:extLst>
+          </p:cNvPr>
+          <p:cNvSpPr/>
+          <p:nvPr/>
+        </p:nvSpPr>
+        <p:spPr>
+          <a:xfrm>
+            <a:off x="6748272" y="3904488"/>
+            <a:ext cx="4709160" cy="320040"/>
+          </a:xfrm>
+          <a:prstGeom prst="rect">
+            <a:avLst/>
+          </a:prstGeom>
+          <a:noFill/>
+          <a:ln/>
+        </p:spPr>
+        <p:txBody>
+          <a:bodyPr wrap="square" lIns="0" tIns="0" rIns="0" bIns="0" rtlCol="0" anchor="ctr"/>
+          <a:lstStyle/>
+          <a:p>
+            <a:pPr marL="0" indent="0">
+              <a:buNone/>
+            </a:pPr>
+            <a:endParaRPr lang="en-US" sz="1400" dirty="0"/>
+          </a:p>
+        </p:txBody>
+      </p:sp>
+      <p:sp>
+        <p:nvSpPr>
+          <p:cNvPr id="28" name="Text 22">
+            <a:extLst>
+              <a:ext uri="{FF2B5EF4-FFF2-40B4-BE49-F238E27FC236}">
+                <a16:creationId xmlns:a16="http://schemas.microsoft.com/office/drawing/2014/main" id="{D5073A88-C049-338E-FD20-21A5918276FE}"/>
+              </a:ext>
+            </a:extLst>
+          </p:cNvPr>
+          <p:cNvSpPr/>
+          <p:nvPr/>
+        </p:nvSpPr>
+        <p:spPr>
+          <a:xfrm>
+            <a:off x="11548872" y="320040"/>
+            <a:ext cx="365760" cy="274320"/>
+          </a:xfrm>
+          <a:prstGeom prst="rect">
+            <a:avLst/>
+          </a:prstGeom>
+          <a:noFill/>
+          <a:ln/>
+        </p:spPr>
+        <p:txBody>
+          <a:bodyPr wrap="square" rtlCol="0" anchor="ctr"/>
+          <a:lstStyle/>
+          <a:p>
+            <a:pPr marL="0" indent="0" algn="r">
+              <a:buNone/>
+            </a:pPr>
+            <a:r>
+              <a:rPr lang="en-US" sz="1000" dirty="0">
+                <a:solidFill>
+                  <a:srgbClr val="5B6B7A"/>
+                </a:solidFill>
+                <a:latin typeface="Calibri" pitchFamily="34" charset="0"/>
+                <a:ea typeface="Calibri" pitchFamily="34" charset="-122"/>
+                <a:cs typeface="Calibri" pitchFamily="34" charset="-120"/>
+              </a:rPr>
+              <a:t>12</a:t>
+            </a:r>
+            <a:endParaRPr lang="en-US" sz="1000" dirty="0"/>
+          </a:p>
+        </p:txBody>
+      </p:sp>
+      <p:sp>
+        <p:nvSpPr>
+          <p:cNvPr id="30" name="Shape 15">
+            <a:extLst>
+              <a:ext uri="{FF2B5EF4-FFF2-40B4-BE49-F238E27FC236}">
+                <a16:creationId xmlns:a16="http://schemas.microsoft.com/office/drawing/2014/main" id="{4C3A393F-7604-06DF-42E8-CB1DCAE089AD}"/>
+              </a:ext>
+            </a:extLst>
+          </p:cNvPr>
+          <p:cNvSpPr/>
+          <p:nvPr/>
+        </p:nvSpPr>
+        <p:spPr>
+          <a:xfrm>
+            <a:off x="859536" y="1460545"/>
+            <a:ext cx="675547" cy="467452"/>
+          </a:xfrm>
+          <a:prstGeom prst="ellipse">
+            <a:avLst/>
+          </a:prstGeom>
+          <a:solidFill>
+            <a:srgbClr val="FFFFFF"/>
+          </a:solidFill>
+          <a:ln/>
+        </p:spPr>
+      </p:sp>
+      <p:sp>
+        <p:nvSpPr>
+          <p:cNvPr id="36" name="Rectangle: Rounded Corners 35">
+            <a:extLst>
+              <a:ext uri="{FF2B5EF4-FFF2-40B4-BE49-F238E27FC236}">
+                <a16:creationId xmlns:a16="http://schemas.microsoft.com/office/drawing/2014/main" id="{735643F8-6AC1-E169-1C84-A0670369B023}"/>
+              </a:ext>
+            </a:extLst>
+          </p:cNvPr>
+          <p:cNvSpPr/>
+          <p:nvPr/>
+        </p:nvSpPr>
+        <p:spPr>
+          <a:xfrm>
+            <a:off x="879648" y="1460543"/>
+            <a:ext cx="10422334" cy="657813"/>
+          </a:xfrm>
+          <a:prstGeom prst="roundRect">
+            <a:avLst/>
+          </a:prstGeom>
+          <a:solidFill>
+            <a:schemeClr val="bg1">
+              <a:lumMod val="95000"/>
+            </a:schemeClr>
+          </a:solidFill>
+        </p:spPr>
+        <p:style>
+          <a:lnRef idx="2">
+            <a:schemeClr val="accent6"/>
+          </a:lnRef>
+          <a:fillRef idx="1">
+            <a:schemeClr val="lt1"/>
+          </a:fillRef>
+          <a:effectRef idx="0">
+            <a:schemeClr val="accent6"/>
+          </a:effectRef>
+          <a:fontRef idx="minor">
+            <a:schemeClr val="dk1"/>
+          </a:fontRef>
+        </p:style>
+        <p:txBody>
+          <a:bodyPr rtlCol="0" anchor="ctr"/>
+          <a:lstStyle/>
+          <a:p>
+            <a:endParaRPr lang="en-US" dirty="0">
+              <a:latin typeface="Aptos" panose="020B0004020202020204" pitchFamily="34" charset="0"/>
+            </a:endParaRPr>
+          </a:p>
+          <a:p>
+            <a:r>
+              <a:rPr lang="en-US" dirty="0">
+                <a:ln w="0"/>
+                <a:solidFill>
+                  <a:schemeClr val="accent1"/>
+                </a:solidFill>
+                <a:effectLst>
+                  <a:outerShdw blurRad="38100" dist="25400" dir="5400000" algn="ctr" rotWithShape="0">
+                    <a:srgbClr val="6E747A">
+                      <a:alpha val="43000"/>
+                    </a:srgbClr>
+                  </a:outerShdw>
+                </a:effectLst>
+                <a:latin typeface="Aptos" panose="020B0004020202020204" pitchFamily="34" charset="0"/>
+              </a:rPr>
+              <a:t>                 </a:t>
+            </a:r>
+          </a:p>
+          <a:p>
+            <a:r>
+              <a:rPr lang="en-US" dirty="0">
+                <a:ln w="0"/>
+                <a:solidFill>
+                  <a:schemeClr val="accent1"/>
+                </a:solidFill>
+                <a:effectLst>
+                  <a:outerShdw blurRad="38100" dist="25400" dir="5400000" algn="ctr" rotWithShape="0">
+                    <a:srgbClr val="6E747A">
+                      <a:alpha val="43000"/>
+                    </a:srgbClr>
+                  </a:outerShdw>
+                </a:effectLst>
+                <a:latin typeface="Aptos" panose="020B0004020202020204" pitchFamily="34" charset="0"/>
+              </a:rPr>
+              <a:t>               Maharashtra contributes highest revenue but also highest delivery delays.</a:t>
+            </a:r>
+            <a:endParaRPr lang="en-IN" dirty="0">
+              <a:ln w="0"/>
+              <a:solidFill>
+                <a:schemeClr val="accent1"/>
+              </a:solidFill>
+              <a:effectLst>
+                <a:outerShdw blurRad="38100" dist="25400" dir="5400000" algn="ctr" rotWithShape="0">
+                  <a:srgbClr val="6E747A">
+                    <a:alpha val="43000"/>
+                  </a:srgbClr>
+                </a:outerShdw>
+              </a:effectLst>
+              <a:latin typeface="Aptos" panose="020B0004020202020204" pitchFamily="34" charset="0"/>
+            </a:endParaRPr>
+          </a:p>
+          <a:p>
+            <a:endParaRPr lang="en-US" dirty="0">
+              <a:ln w="0"/>
+              <a:solidFill>
+                <a:schemeClr val="accent1"/>
+              </a:solidFill>
+              <a:effectLst>
+                <a:outerShdw blurRad="38100" dist="25400" dir="5400000" algn="ctr" rotWithShape="0">
+                  <a:srgbClr val="6E747A">
+                    <a:alpha val="43000"/>
+                  </a:srgbClr>
+                </a:outerShdw>
+              </a:effectLst>
+            </a:endParaRPr>
+          </a:p>
+          <a:p>
+            <a:endParaRPr lang="en-IN" dirty="0"/>
+          </a:p>
+        </p:txBody>
+      </p:sp>
+      <p:pic>
+        <p:nvPicPr>
+          <p:cNvPr id="39" name="Image 0" descr="preencoded.png">
+            <a:extLst>
+              <a:ext uri="{FF2B5EF4-FFF2-40B4-BE49-F238E27FC236}">
+                <a16:creationId xmlns:a16="http://schemas.microsoft.com/office/drawing/2014/main" id="{3E5BE42F-C091-5B39-9318-539214D60EE5}"/>
+              </a:ext>
+            </a:extLst>
+          </p:cNvPr>
+          <p:cNvPicPr>
+            <a:picLocks noChangeAspect="1"/>
+          </p:cNvPicPr>
+          <p:nvPr/>
+        </p:nvPicPr>
+        <p:blipFill>
+          <a:blip r:embed="rId3"/>
+          <a:stretch>
+            <a:fillRect/>
+          </a:stretch>
+        </p:blipFill>
+        <p:spPr>
+          <a:xfrm>
+            <a:off x="1166622" y="1757101"/>
+            <a:ext cx="251460" cy="251460"/>
+          </a:xfrm>
+          <a:prstGeom prst="rect">
+            <a:avLst/>
+          </a:prstGeom>
+        </p:spPr>
+      </p:pic>
+      <p:sp>
+        <p:nvSpPr>
+          <p:cNvPr id="40" name="Rectangle 39">
+            <a:extLst>
+              <a:ext uri="{FF2B5EF4-FFF2-40B4-BE49-F238E27FC236}">
+                <a16:creationId xmlns:a16="http://schemas.microsoft.com/office/drawing/2014/main" id="{AEDB4012-8354-012F-3EA1-E90D2F724025}"/>
+              </a:ext>
+            </a:extLst>
+          </p:cNvPr>
+          <p:cNvSpPr/>
+          <p:nvPr/>
+        </p:nvSpPr>
+        <p:spPr>
+          <a:xfrm>
+            <a:off x="6003634" y="2967335"/>
+            <a:ext cx="184730" cy="923330"/>
+          </a:xfrm>
+          <a:prstGeom prst="rect">
+            <a:avLst/>
+          </a:prstGeom>
+          <a:noFill/>
+        </p:spPr>
+        <p:txBody>
+          <a:bodyPr wrap="none" lIns="91440" tIns="45720" rIns="91440" bIns="45720">
+            <a:spAutoFit/>
+          </a:bodyPr>
+          <a:lstStyle/>
+          <a:p>
+            <a:pPr algn="ctr"/>
+            <a:endParaRPr lang="en-US" sz="5400" b="0" cap="none" spc="0" dirty="0">
+              <a:ln w="0"/>
+              <a:solidFill>
+                <a:schemeClr val="accent1"/>
+              </a:solidFill>
+              <a:effectLst>
+                <a:outerShdw blurRad="38100" dist="25400" dir="5400000" algn="ctr" rotWithShape="0">
+                  <a:srgbClr val="6E747A">
+                    <a:alpha val="43000"/>
+                  </a:srgbClr>
+                </a:outerShdw>
+              </a:effectLst>
+            </a:endParaRPr>
+          </a:p>
+        </p:txBody>
+      </p:sp>
+      <p:sp>
+        <p:nvSpPr>
+          <p:cNvPr id="44" name="Rectangle: Rounded Corners 43">
+            <a:extLst>
+              <a:ext uri="{FF2B5EF4-FFF2-40B4-BE49-F238E27FC236}">
+                <a16:creationId xmlns:a16="http://schemas.microsoft.com/office/drawing/2014/main" id="{84A1D017-A6C9-6503-61E3-E9C14CBD36F6}"/>
+              </a:ext>
+            </a:extLst>
+          </p:cNvPr>
+          <p:cNvSpPr/>
+          <p:nvPr/>
+        </p:nvSpPr>
+        <p:spPr>
+          <a:xfrm>
+            <a:off x="879648" y="2405984"/>
+            <a:ext cx="10422334" cy="699548"/>
+          </a:xfrm>
+          <a:prstGeom prst="roundRect">
+            <a:avLst/>
+          </a:prstGeom>
+          <a:solidFill>
+            <a:schemeClr val="bg1">
+              <a:lumMod val="95000"/>
+            </a:schemeClr>
+          </a:solidFill>
+        </p:spPr>
+        <p:style>
+          <a:lnRef idx="2">
+            <a:schemeClr val="accent6"/>
+          </a:lnRef>
+          <a:fillRef idx="1">
+            <a:schemeClr val="lt1"/>
+          </a:fillRef>
+          <a:effectRef idx="0">
+            <a:schemeClr val="accent6"/>
+          </a:effectRef>
+          <a:fontRef idx="minor">
+            <a:schemeClr val="dk1"/>
+          </a:fontRef>
+        </p:style>
+        <p:txBody>
+          <a:bodyPr rtlCol="0" anchor="ctr"/>
+          <a:lstStyle/>
+          <a:p>
+            <a:pPr algn="ctr"/>
+            <a:endParaRPr lang="en-US" dirty="0">
+              <a:latin typeface="Aptos" panose="020B0004020202020204" pitchFamily="34" charset="0"/>
+            </a:endParaRPr>
+          </a:p>
+          <a:p>
+            <a:r>
+              <a:rPr lang="en-US" dirty="0">
+                <a:ln w="0"/>
+                <a:solidFill>
+                  <a:schemeClr val="accent1"/>
+                </a:solidFill>
+                <a:effectLst>
+                  <a:outerShdw blurRad="38100" dist="25400" dir="5400000" algn="ctr" rotWithShape="0">
+                    <a:srgbClr val="6E747A">
+                      <a:alpha val="43000"/>
+                    </a:srgbClr>
+                  </a:outerShdw>
+                </a:effectLst>
+                <a:latin typeface="Aptos" panose="020B0004020202020204" pitchFamily="34" charset="0"/>
+              </a:rPr>
+              <a:t>               Emergency tenders have lower performance than other categories.</a:t>
+            </a:r>
+            <a:endParaRPr lang="en-US" dirty="0">
+              <a:ln w="0"/>
+              <a:solidFill>
+                <a:schemeClr val="accent1"/>
+              </a:solidFill>
+              <a:effectLst>
+                <a:outerShdw blurRad="38100" dist="25400" dir="5400000" algn="ctr" rotWithShape="0">
+                  <a:srgbClr val="6E747A">
+                    <a:alpha val="43000"/>
+                  </a:srgbClr>
+                </a:outerShdw>
+              </a:effectLst>
+            </a:endParaRPr>
+          </a:p>
+          <a:p>
+            <a:pPr algn="ctr"/>
+            <a:endParaRPr lang="en-IN" dirty="0"/>
+          </a:p>
+        </p:txBody>
+      </p:sp>
+      <p:sp>
+        <p:nvSpPr>
+          <p:cNvPr id="45" name="Rectangle: Rounded Corners 44">
+            <a:extLst>
+              <a:ext uri="{FF2B5EF4-FFF2-40B4-BE49-F238E27FC236}">
+                <a16:creationId xmlns:a16="http://schemas.microsoft.com/office/drawing/2014/main" id="{2B1C9FFD-A0D4-F11F-89DE-BE5253A12A5E}"/>
+              </a:ext>
+            </a:extLst>
+          </p:cNvPr>
+          <p:cNvSpPr/>
+          <p:nvPr/>
+        </p:nvSpPr>
+        <p:spPr>
+          <a:xfrm>
+            <a:off x="879648" y="3407954"/>
+            <a:ext cx="10422334" cy="765869"/>
+          </a:xfrm>
+          <a:prstGeom prst="roundRect">
+            <a:avLst/>
+          </a:prstGeom>
+          <a:solidFill>
+            <a:schemeClr val="bg1">
+              <a:lumMod val="95000"/>
+            </a:schemeClr>
+          </a:solidFill>
+        </p:spPr>
+        <p:style>
+          <a:lnRef idx="2">
+            <a:schemeClr val="accent6"/>
+          </a:lnRef>
+          <a:fillRef idx="1">
+            <a:schemeClr val="lt1"/>
+          </a:fillRef>
+          <a:effectRef idx="0">
+            <a:schemeClr val="accent6"/>
+          </a:effectRef>
+          <a:fontRef idx="minor">
+            <a:schemeClr val="dk1"/>
+          </a:fontRef>
+        </p:style>
+        <p:txBody>
+          <a:bodyPr rtlCol="0" anchor="ctr"/>
+          <a:lstStyle/>
+          <a:p>
+            <a:pPr algn="ctr"/>
+            <a:endParaRPr lang="en-US" dirty="0">
+              <a:latin typeface="Aptos" panose="020B0004020202020204" pitchFamily="34" charset="0"/>
+            </a:endParaRPr>
+          </a:p>
+          <a:p>
+            <a:r>
+              <a:rPr lang="en-US" dirty="0">
+                <a:ln w="0"/>
+                <a:solidFill>
+                  <a:schemeClr val="accent1"/>
+                </a:solidFill>
+                <a:effectLst>
+                  <a:outerShdw blurRad="38100" dist="25400" dir="5400000" algn="ctr" rotWithShape="0">
+                    <a:srgbClr val="6E747A">
+                      <a:alpha val="43000"/>
+                    </a:srgbClr>
+                  </a:outerShdw>
+                </a:effectLst>
+                <a:latin typeface="Aptos" panose="020B0004020202020204" pitchFamily="34" charset="0"/>
+              </a:rPr>
+              <a:t>              Capsule and Tablet medicines show highest expiry risk.</a:t>
+            </a:r>
+            <a:endParaRPr lang="en-US" dirty="0">
+              <a:ln w="0"/>
+              <a:solidFill>
+                <a:schemeClr val="accent1"/>
+              </a:solidFill>
+              <a:effectLst>
+                <a:outerShdw blurRad="38100" dist="25400" dir="5400000" algn="ctr" rotWithShape="0">
+                  <a:srgbClr val="6E747A">
+                    <a:alpha val="43000"/>
+                  </a:srgbClr>
+                </a:outerShdw>
+              </a:effectLst>
+            </a:endParaRPr>
+          </a:p>
+          <a:p>
+            <a:pPr algn="ctr"/>
+            <a:endParaRPr lang="en-IN" dirty="0"/>
+          </a:p>
+        </p:txBody>
+      </p:sp>
+      <p:sp>
+        <p:nvSpPr>
+          <p:cNvPr id="46" name="Rectangle: Rounded Corners 45">
+            <a:extLst>
+              <a:ext uri="{FF2B5EF4-FFF2-40B4-BE49-F238E27FC236}">
+                <a16:creationId xmlns:a16="http://schemas.microsoft.com/office/drawing/2014/main" id="{E724CA74-25F8-F722-33D0-ED79C2F86063}"/>
+              </a:ext>
+            </a:extLst>
+          </p:cNvPr>
+          <p:cNvSpPr/>
+          <p:nvPr/>
+        </p:nvSpPr>
+        <p:spPr>
+          <a:xfrm>
+            <a:off x="879647" y="4510761"/>
+            <a:ext cx="10422335" cy="792759"/>
+          </a:xfrm>
+          <a:prstGeom prst="roundRect">
+            <a:avLst>
+              <a:gd name="adj" fmla="val 13172"/>
+            </a:avLst>
+          </a:prstGeom>
+          <a:solidFill>
+            <a:schemeClr val="bg1">
+              <a:lumMod val="95000"/>
+            </a:schemeClr>
+          </a:solidFill>
+        </p:spPr>
+        <p:style>
+          <a:lnRef idx="2">
+            <a:schemeClr val="accent6"/>
+          </a:lnRef>
+          <a:fillRef idx="1">
+            <a:schemeClr val="lt1"/>
+          </a:fillRef>
+          <a:effectRef idx="0">
+            <a:schemeClr val="accent6"/>
+          </a:effectRef>
+          <a:fontRef idx="minor">
+            <a:schemeClr val="dk1"/>
+          </a:fontRef>
+        </p:style>
+        <p:txBody>
+          <a:bodyPr rtlCol="0" anchor="ctr"/>
+          <a:lstStyle/>
+          <a:p>
+            <a:pPr algn="ctr"/>
+            <a:endParaRPr lang="en-US" dirty="0">
+              <a:latin typeface="Aptos" panose="020B0004020202020204" pitchFamily="34" charset="0"/>
+            </a:endParaRPr>
+          </a:p>
+          <a:p>
+            <a:r>
+              <a:rPr lang="en-US" dirty="0">
+                <a:ln w="0"/>
+                <a:solidFill>
+                  <a:schemeClr val="accent1"/>
+                </a:solidFill>
+                <a:effectLst>
+                  <a:outerShdw blurRad="38100" dist="25400" dir="5400000" algn="ctr" rotWithShape="0">
+                    <a:srgbClr val="6E747A">
+                      <a:alpha val="43000"/>
+                    </a:srgbClr>
+                  </a:outerShdw>
+                </a:effectLst>
+                <a:latin typeface="Aptos" panose="020B0004020202020204" pitchFamily="34" charset="0"/>
+              </a:rPr>
+              <a:t>                 ESIC Hospital has highest outstanding payments.</a:t>
+            </a:r>
+            <a:endParaRPr lang="en-US" dirty="0">
+              <a:ln w="0"/>
+              <a:solidFill>
+                <a:schemeClr val="accent1"/>
+              </a:solidFill>
+              <a:effectLst>
+                <a:outerShdw blurRad="38100" dist="25400" dir="5400000" algn="ctr" rotWithShape="0">
+                  <a:srgbClr val="6E747A">
+                    <a:alpha val="43000"/>
+                  </a:srgbClr>
+                </a:outerShdw>
+              </a:effectLst>
+            </a:endParaRPr>
+          </a:p>
+          <a:p>
+            <a:pPr algn="ctr"/>
+            <a:endParaRPr lang="en-IN" dirty="0"/>
+          </a:p>
+        </p:txBody>
+      </p:sp>
+      <p:sp>
+        <p:nvSpPr>
+          <p:cNvPr id="47" name="Rectangle: Rounded Corners 46">
+            <a:extLst>
+              <a:ext uri="{FF2B5EF4-FFF2-40B4-BE49-F238E27FC236}">
+                <a16:creationId xmlns:a16="http://schemas.microsoft.com/office/drawing/2014/main" id="{0A98795C-E8F9-10F4-CEE7-C5411798AA86}"/>
+              </a:ext>
+            </a:extLst>
+          </p:cNvPr>
+          <p:cNvSpPr/>
+          <p:nvPr/>
+        </p:nvSpPr>
+        <p:spPr>
+          <a:xfrm>
+            <a:off x="823236" y="5623254"/>
+            <a:ext cx="10478746" cy="792759"/>
+          </a:xfrm>
+          <a:prstGeom prst="roundRect">
+            <a:avLst/>
+          </a:prstGeom>
+          <a:solidFill>
+            <a:schemeClr val="bg1">
+              <a:lumMod val="95000"/>
+            </a:schemeClr>
+          </a:solidFill>
+        </p:spPr>
+        <p:style>
+          <a:lnRef idx="2">
+            <a:schemeClr val="accent6"/>
+          </a:lnRef>
+          <a:fillRef idx="1">
+            <a:schemeClr val="lt1"/>
+          </a:fillRef>
+          <a:effectRef idx="0">
+            <a:schemeClr val="accent6"/>
+          </a:effectRef>
+          <a:fontRef idx="minor">
+            <a:schemeClr val="dk1"/>
+          </a:fontRef>
+        </p:style>
+        <p:txBody>
+          <a:bodyPr rtlCol="0" anchor="ctr"/>
+          <a:lstStyle/>
+          <a:p>
+            <a:endParaRPr lang="en-US" dirty="0">
+              <a:latin typeface="Aptos" panose="020B0004020202020204" pitchFamily="34" charset="0"/>
+            </a:endParaRPr>
+          </a:p>
+          <a:p>
+            <a:r>
+              <a:rPr lang="en-US" dirty="0">
+                <a:ln w="0"/>
+                <a:solidFill>
+                  <a:schemeClr val="accent1"/>
+                </a:solidFill>
+                <a:effectLst>
+                  <a:outerShdw blurRad="38100" dist="25400" dir="5400000" algn="ctr" rotWithShape="0">
+                    <a:srgbClr val="6E747A">
+                      <a:alpha val="43000"/>
+                    </a:srgbClr>
+                  </a:outerShdw>
+                </a:effectLst>
+                <a:latin typeface="Aptos" panose="020B0004020202020204" pitchFamily="34" charset="0"/>
+              </a:rPr>
+              <a:t> </a:t>
+            </a:r>
+          </a:p>
+          <a:p>
+            <a:r>
+              <a:rPr lang="en-US" dirty="0">
+                <a:ln w="0"/>
+                <a:solidFill>
+                  <a:schemeClr val="accent1"/>
+                </a:solidFill>
+                <a:effectLst>
+                  <a:outerShdw blurRad="38100" dist="25400" dir="5400000" algn="ctr" rotWithShape="0">
+                    <a:srgbClr val="6E747A">
+                      <a:alpha val="43000"/>
+                    </a:srgbClr>
+                  </a:outerShdw>
+                </a:effectLst>
+                <a:latin typeface="Aptos" panose="020B0004020202020204" pitchFamily="34" charset="0"/>
+              </a:rPr>
+              <a:t>               Average payment age exceeds 280 days, creating collection risk..</a:t>
+            </a:r>
+            <a:endParaRPr lang="en-IN" dirty="0">
+              <a:ln w="0"/>
+              <a:solidFill>
+                <a:schemeClr val="accent1"/>
+              </a:solidFill>
+              <a:effectLst>
+                <a:outerShdw blurRad="38100" dist="25400" dir="5400000" algn="ctr" rotWithShape="0">
+                  <a:srgbClr val="6E747A">
+                    <a:alpha val="43000"/>
+                  </a:srgbClr>
+                </a:outerShdw>
+              </a:effectLst>
+              <a:latin typeface="Aptos" panose="020B0004020202020204" pitchFamily="34" charset="0"/>
+            </a:endParaRPr>
+          </a:p>
+          <a:p>
+            <a:endParaRPr lang="en-US" dirty="0">
+              <a:ln w="0"/>
+              <a:solidFill>
+                <a:schemeClr val="accent1"/>
+              </a:solidFill>
+              <a:effectLst>
+                <a:outerShdw blurRad="38100" dist="25400" dir="5400000" algn="ctr" rotWithShape="0">
+                  <a:srgbClr val="6E747A">
+                    <a:alpha val="43000"/>
+                  </a:srgbClr>
+                </a:outerShdw>
+              </a:effectLst>
+            </a:endParaRPr>
+          </a:p>
+          <a:p>
+            <a:endParaRPr lang="en-IN" dirty="0"/>
+          </a:p>
+        </p:txBody>
+      </p:sp>
+      <p:pic>
+        <p:nvPicPr>
+          <p:cNvPr id="50" name="Graphic 49" descr="Crown with solid fill">
+            <a:extLst>
+              <a:ext uri="{FF2B5EF4-FFF2-40B4-BE49-F238E27FC236}">
+                <a16:creationId xmlns:a16="http://schemas.microsoft.com/office/drawing/2014/main" id="{4057777B-4B53-FF3C-4BE0-54B06ED6D90A}"/>
+              </a:ext>
+            </a:extLst>
+          </p:cNvPr>
+          <p:cNvPicPr>
+            <a:picLocks noChangeAspect="1"/>
+          </p:cNvPicPr>
+          <p:nvPr/>
+        </p:nvPicPr>
+        <p:blipFill>
+          <a:blip>
+            <a:extLst>
+              <a:ext uri="{96DAC541-7B7A-43D3-8B79-37D633B846F1}">
+                <asvg:svgBlip xmlns:asvg="http://schemas.microsoft.com/office/drawing/2016/SVG/main" r:embed="rId4"/>
+              </a:ext>
+            </a:extLst>
+          </a:blip>
+          <a:stretch>
+            <a:fillRect/>
+          </a:stretch>
+        </p:blipFill>
+        <p:spPr>
+          <a:xfrm>
+            <a:off x="1100189" y="1527504"/>
+            <a:ext cx="472107" cy="472107"/>
+          </a:xfrm>
+          <a:prstGeom prst="rect">
+            <a:avLst/>
+          </a:prstGeom>
+        </p:spPr>
+      </p:pic>
+      <p:pic>
+        <p:nvPicPr>
+          <p:cNvPr id="52" name="Graphic 51" descr="Pie chart with solid fill">
+            <a:extLst>
+              <a:ext uri="{FF2B5EF4-FFF2-40B4-BE49-F238E27FC236}">
+                <a16:creationId xmlns:a16="http://schemas.microsoft.com/office/drawing/2014/main" id="{EEC94985-8060-4974-A950-100DBC368972}"/>
+              </a:ext>
+            </a:extLst>
+          </p:cNvPr>
+          <p:cNvPicPr>
+            <a:picLocks noChangeAspect="1"/>
+          </p:cNvPicPr>
+          <p:nvPr/>
+        </p:nvPicPr>
+        <p:blipFill>
+          <a:blip>
+            <a:extLst>
+              <a:ext uri="{96DAC541-7B7A-43D3-8B79-37D633B846F1}">
+                <asvg:svgBlip xmlns:asvg="http://schemas.microsoft.com/office/drawing/2016/SVG/main" r:embed="rId5"/>
+              </a:ext>
+            </a:extLst>
+          </a:blip>
+          <a:stretch>
+            <a:fillRect/>
+          </a:stretch>
+        </p:blipFill>
+        <p:spPr>
+          <a:xfrm>
+            <a:off x="1100189" y="2554390"/>
+            <a:ext cx="435698" cy="435698"/>
+          </a:xfrm>
+          <a:prstGeom prst="rect">
+            <a:avLst/>
+          </a:prstGeom>
+        </p:spPr>
+      </p:pic>
+      <p:pic>
+        <p:nvPicPr>
+          <p:cNvPr id="54" name="Graphic 53" descr="Network with solid fill">
+            <a:extLst>
+              <a:ext uri="{FF2B5EF4-FFF2-40B4-BE49-F238E27FC236}">
+                <a16:creationId xmlns:a16="http://schemas.microsoft.com/office/drawing/2014/main" id="{B8A1F7B9-7DDC-3B80-D2BF-433940493352}"/>
+              </a:ext>
+            </a:extLst>
+          </p:cNvPr>
+          <p:cNvPicPr>
+            <a:picLocks noChangeAspect="1"/>
+          </p:cNvPicPr>
+          <p:nvPr/>
+        </p:nvPicPr>
+        <p:blipFill>
+          <a:blip>
+            <a:extLst>
+              <a:ext uri="{96DAC541-7B7A-43D3-8B79-37D633B846F1}">
+                <asvg:svgBlip xmlns:asvg="http://schemas.microsoft.com/office/drawing/2016/SVG/main" r:embed="rId6"/>
+              </a:ext>
+            </a:extLst>
+          </a:blip>
+          <a:stretch>
+            <a:fillRect/>
+          </a:stretch>
+        </p:blipFill>
+        <p:spPr>
+          <a:xfrm>
+            <a:off x="1085704" y="3452454"/>
+            <a:ext cx="501075" cy="501075"/>
+          </a:xfrm>
+          <a:prstGeom prst="rect">
+            <a:avLst/>
+          </a:prstGeom>
+        </p:spPr>
+      </p:pic>
+      <p:pic>
+        <p:nvPicPr>
+          <p:cNvPr id="56" name="Graphic 55" descr="Money with solid fill">
+            <a:extLst>
+              <a:ext uri="{FF2B5EF4-FFF2-40B4-BE49-F238E27FC236}">
+                <a16:creationId xmlns:a16="http://schemas.microsoft.com/office/drawing/2014/main" id="{86DEB122-5287-48A2-35AB-E6FA1F5F0053}"/>
+              </a:ext>
+            </a:extLst>
+          </p:cNvPr>
+          <p:cNvPicPr>
+            <a:picLocks noChangeAspect="1"/>
+          </p:cNvPicPr>
+          <p:nvPr/>
+        </p:nvPicPr>
+        <p:blipFill>
+          <a:blip>
+            <a:extLst>
+              <a:ext uri="{96DAC541-7B7A-43D3-8B79-37D633B846F1}">
+                <asvg:svgBlip xmlns:asvg="http://schemas.microsoft.com/office/drawing/2016/SVG/main" r:embed="rId7"/>
+              </a:ext>
+            </a:extLst>
+          </a:blip>
+          <a:stretch>
+            <a:fillRect/>
+          </a:stretch>
+        </p:blipFill>
+        <p:spPr>
+          <a:xfrm>
+            <a:off x="995504" y="4612452"/>
+            <a:ext cx="591275" cy="591275"/>
+          </a:xfrm>
+          <a:prstGeom prst="rect">
+            <a:avLst/>
+          </a:prstGeom>
+        </p:spPr>
+      </p:pic>
+      <p:pic>
+        <p:nvPicPr>
+          <p:cNvPr id="60" name="Graphic 59" descr="Warning with solid fill">
+            <a:extLst>
+              <a:ext uri="{FF2B5EF4-FFF2-40B4-BE49-F238E27FC236}">
+                <a16:creationId xmlns:a16="http://schemas.microsoft.com/office/drawing/2014/main" id="{B760E275-E295-8C38-D997-747BEB523D8D}"/>
+              </a:ext>
+            </a:extLst>
+          </p:cNvPr>
+          <p:cNvPicPr>
+            <a:picLocks noChangeAspect="1"/>
+          </p:cNvPicPr>
+          <p:nvPr/>
+        </p:nvPicPr>
+        <p:blipFill>
+          <a:blip>
+            <a:extLst>
+              <a:ext uri="{96DAC541-7B7A-43D3-8B79-37D633B846F1}">
+                <asvg:svgBlip xmlns:asvg="http://schemas.microsoft.com/office/drawing/2016/SVG/main" r:embed="rId8"/>
+              </a:ext>
+            </a:extLst>
+          </a:blip>
+          <a:stretch>
+            <a:fillRect/>
+          </a:stretch>
+        </p:blipFill>
+        <p:spPr>
+          <a:xfrm>
+            <a:off x="1078992" y="5773436"/>
+            <a:ext cx="456895" cy="456895"/>
+          </a:xfrm>
+          <a:prstGeom prst="rect">
+            <a:avLst/>
+          </a:prstGeom>
+        </p:spPr>
+      </p:pic>
+    </p:spTree>
+    <p:extLst>
+      <p:ext uri="{BB962C8B-B14F-4D97-AF65-F5344CB8AC3E}">
+        <p14:creationId xmlns:p14="http://schemas.microsoft.com/office/powerpoint/2010/main" val="2276943652"/>
+      </p:ext>
+    </p:extLst>
+  </p:cSld>
+  <p:clrMapOvr>
+    <a:masterClrMapping/>
+  </p:clrMapOvr>
+</p:sld>
+</file>
+
+<file path=ppt/slides/slide13.xml><?xml version="1.0" encoding="utf-8"?>
 <p:sld xmlns:a="http://schemas.openxmlformats.org/drawingml/2006/main" xmlns:r="http://schemas.openxmlformats.org/officeDocument/2006/relationships" xmlns:p="http://schemas.openxmlformats.org/presentationml/2006/main">
   <p:cSld name="Slide 12">
     <p:bg>
@@ -4626,9 +6013,6 @@
           <a:bodyPr wrap="square" lIns="0" tIns="0" rIns="0" bIns="0" rtlCol="0" anchor="ctr"/>
           <a:lstStyle/>
           <a:p>
-            <a:pPr marL="0" indent="0">
-              <a:buNone/>
-            </a:pPr>
             <a:r>
               <a:rPr lang="en-US" sz="1100" i="1" dirty="0">
                 <a:solidFill>
@@ -4638,10 +6022,12 @@
                 <a:ea typeface="Calibri" pitchFamily="34" charset="-122"/>
                 <a:cs typeface="Calibri" pitchFamily="34" charset="-120"/>
               </a:rPr>
-              <a:t>Average delivery delay by 6 days .Highest numbers  of delay of deliveries is </a:t>
-            </a:r>
-            <a:r>
-              <a:rPr lang="en-US" sz="1100" i="1" dirty="0" err="1">
+              <a:t>Average delivery delay is approximately 6 days.</a:t>
+            </a:r>
+          </a:p>
+          <a:p>
+            <a:r>
+              <a:rPr lang="en-US" sz="1100" i="1" dirty="0">
                 <a:solidFill>
                   <a:srgbClr val="5B6B7A"/>
                 </a:solidFill>
@@ -4649,18 +6035,7 @@
                 <a:ea typeface="Calibri" pitchFamily="34" charset="-122"/>
                 <a:cs typeface="Calibri" pitchFamily="34" charset="-120"/>
               </a:rPr>
-              <a:t>i</a:t>
-            </a:r>
-            <a:r>
-              <a:rPr lang="en-US" sz="1100" i="1" dirty="0">
-                <a:solidFill>
-                  <a:srgbClr val="5B6B7A"/>
-                </a:solidFill>
-                <a:latin typeface="Calibri" pitchFamily="34" charset="0"/>
-                <a:ea typeface="Calibri" pitchFamily="34" charset="-122"/>
-                <a:cs typeface="Calibri" pitchFamily="34" charset="-120"/>
-              </a:rPr>
-              <a:t> Maharashtra </a:t>
+              <a:t>Maharashtra records the highest delivery delays among all states.</a:t>
             </a:r>
             <a:endParaRPr lang="en-US" sz="1100" dirty="0"/>
           </a:p>
@@ -5013,7 +6388,7 @@
 </p:sld>
 </file>
 
-<file path=ppt/slides/slide13.xml><?xml version="1.0" encoding="utf-8"?>
+<file path=ppt/slides/slide14.xml><?xml version="1.0" encoding="utf-8"?>
 <p:sld xmlns:a="http://schemas.openxmlformats.org/drawingml/2006/main" xmlns:r="http://schemas.openxmlformats.org/officeDocument/2006/relationships" xmlns:p="http://schemas.openxmlformats.org/presentationml/2006/main">
   <p:cSld name="Slide 13">
     <p:bg>
@@ -5307,9 +6682,29 @@
                 <a:ea typeface="Calibri" pitchFamily="34" charset="-122"/>
                 <a:cs typeface="Calibri" pitchFamily="34" charset="-120"/>
               </a:rPr>
-              <a:t>Improve bidding strategy for Emergency tenders</a:t>
-            </a:r>
-            <a:endParaRPr lang="en-US" sz="1350" dirty="0"/>
+              <a:t>Review Emergency tender performance.</a:t>
+            </a:r>
+          </a:p>
+          <a:p>
+            <a:pPr marL="285750" indent="-285750">
+              <a:spcAft>
+                <a:spcPts val="1000"/>
+              </a:spcAft>
+              <a:buSzPct val="100000"/>
+              <a:buFont typeface="Arial" panose="020B0604020202020204" pitchFamily="34" charset="0"/>
+              <a:buChar char="•"/>
+            </a:pPr>
+            <a:r>
+              <a:rPr lang="en-US" sz="1350" dirty="0">
+                <a:solidFill>
+                  <a:srgbClr val="1E293B"/>
+                </a:solidFill>
+                <a:latin typeface="Calibri" pitchFamily="34" charset="0"/>
+                <a:ea typeface="Calibri" pitchFamily="34" charset="-122"/>
+                <a:cs typeface="Calibri" pitchFamily="34" charset="-120"/>
+              </a:rPr>
+              <a:t>Study successful bidding patterns.</a:t>
+            </a:r>
           </a:p>
           <a:p>
             <a:pPr marL="342900" indent="-342900">
@@ -5328,27 +6723,7 @@
                 <a:ea typeface="Calibri" pitchFamily="34" charset="-122"/>
                 <a:cs typeface="Calibri" pitchFamily="34" charset="-120"/>
               </a:rPr>
-              <a:t>Study Delhi's approach to lift Maharashtra's win ratio</a:t>
-            </a:r>
-          </a:p>
-          <a:p>
-            <a:pPr marL="342900" indent="-342900">
-              <a:spcAft>
-                <a:spcPts val="1000"/>
-              </a:spcAft>
-              <a:buSzPct val="100000"/>
-              <a:buChar char="•"/>
-            </a:pPr>
-            <a:r>
-              <a:rPr lang="en-US" sz="1350" dirty="0">
-                <a:solidFill>
-                  <a:srgbClr val="1E293B"/>
-                </a:solidFill>
-                <a:latin typeface="Calibri" pitchFamily="34" charset="0"/>
-                <a:ea typeface="Calibri" pitchFamily="34" charset="-122"/>
-                <a:cs typeface="Calibri" pitchFamily="34" charset="-120"/>
-              </a:rPr>
-              <a:t>Maintain  present  a wining ratio while developing strategy for other states   </a:t>
+              <a:t>Increase participation in high-win regions.</a:t>
             </a:r>
             <a:endParaRPr lang="en-US" sz="1350" dirty="0"/>
           </a:p>
@@ -5539,9 +6914,8 @@
                 <a:ea typeface="Calibri" pitchFamily="34" charset="-122"/>
                 <a:cs typeface="Calibri" pitchFamily="34" charset="-120"/>
               </a:rPr>
-              <a:t>Improve logistics in Maharashtra</a:t>
-            </a:r>
-            <a:endParaRPr lang="en-US" sz="1350" dirty="0"/>
+              <a:t>Track supplier performance monthly.</a:t>
+            </a:r>
           </a:p>
           <a:p>
             <a:pPr marL="285750" indent="-285750">
@@ -5561,7 +6935,7 @@
                 <a:ea typeface="Calibri" pitchFamily="34" charset="-122"/>
                 <a:cs typeface="Calibri" pitchFamily="34" charset="-120"/>
               </a:rPr>
-              <a:t>Reduce delayed deliveries</a:t>
+              <a:t>Reduce delivery delays in Maharashtra.</a:t>
             </a:r>
           </a:p>
           <a:p>
@@ -5582,47 +6956,8 @@
                 <a:ea typeface="Calibri" pitchFamily="34" charset="-122"/>
                 <a:cs typeface="Calibri" pitchFamily="34" charset="-120"/>
               </a:rPr>
-              <a:t>Improve a tracking system and fixed a responsibility of On time delivery with concern person.</a:t>
-            </a:r>
-          </a:p>
-          <a:p>
-            <a:pPr marL="285750" indent="-285750">
-              <a:spcAft>
-                <a:spcPts val="1000"/>
-              </a:spcAft>
-              <a:buSzPct val="100000"/>
-              <a:buFont typeface="Arial" panose="020B0604020202020204" pitchFamily="34" charset="0"/>
-              <a:buChar char="•"/>
-            </a:pPr>
-            <a:r>
-              <a:rPr lang="en-US" sz="1350" dirty="0">
-                <a:solidFill>
-                  <a:srgbClr val="1E293B"/>
-                </a:solidFill>
-                <a:latin typeface="Calibri" pitchFamily="34" charset="0"/>
-                <a:ea typeface="Calibri" pitchFamily="34" charset="-122"/>
-                <a:cs typeface="Calibri" pitchFamily="34" charset="-120"/>
-              </a:rPr>
-              <a:t>Prioritize stock rotation for medicines nearing expiry.</a:t>
-            </a:r>
-          </a:p>
-          <a:p>
-            <a:pPr marL="285750" indent="-285750">
-              <a:spcAft>
-                <a:spcPts val="1000"/>
-              </a:spcAft>
-              <a:buSzPct val="100000"/>
-              <a:buFont typeface="Arial" panose="020B0604020202020204" pitchFamily="34" charset="0"/>
-              <a:buChar char="•"/>
-            </a:pPr>
-            <a:endParaRPr lang="en-US" sz="1350" dirty="0">
-              <a:solidFill>
-                <a:srgbClr val="1E293B"/>
-              </a:solidFill>
-              <a:latin typeface="Calibri" pitchFamily="34" charset="0"/>
-              <a:ea typeface="Calibri" pitchFamily="34" charset="-122"/>
-              <a:cs typeface="Calibri" pitchFamily="34" charset="-120"/>
-            </a:endParaRPr>
+              <a:t>Monitor expiry risk using inventory alerts.</a:t>
+            </a:r>
           </a:p>
           <a:p>
             <a:pPr marL="342900" indent="-342900">
@@ -5827,9 +7162,8 @@
                 <a:ea typeface="Calibri" pitchFamily="34" charset="-122"/>
                 <a:cs typeface="Calibri" pitchFamily="34" charset="-120"/>
               </a:rPr>
-              <a:t>Prioritize collection from top hospitals</a:t>
-            </a:r>
-            <a:endParaRPr lang="en-US" sz="1350" dirty="0"/>
+              <a:t>Create ageing-based collection reports.</a:t>
+            </a:r>
           </a:p>
           <a:p>
             <a:pPr marL="342900" indent="-342900">
@@ -5848,7 +7182,7 @@
                 <a:ea typeface="Calibri" pitchFamily="34" charset="-122"/>
                 <a:cs typeface="Calibri" pitchFamily="34" charset="-120"/>
               </a:rPr>
-              <a:t>Implement receivable ageing tracking</a:t>
+              <a:t>Prioritize high-value pending invoices.</a:t>
             </a:r>
           </a:p>
           <a:p>
@@ -5860,22 +7194,17 @@
               <a:buChar char="•"/>
             </a:pPr>
             <a:r>
-              <a:rPr lang="en-US" sz="1350" dirty="0"/>
-              <a:t>Create collection targets for finance teams.</a:t>
-            </a:r>
-          </a:p>
-          <a:p>
-            <a:pPr marL="342900" indent="-342900">
-              <a:spcAft>
-                <a:spcPts val="1000"/>
-              </a:spcAft>
-              <a:buSzPct val="100000"/>
-              <a:buChar char="•"/>
-            </a:pPr>
-            <a:r>
-              <a:rPr lang="en-US" sz="1350" dirty="0"/>
-              <a:t>Prioritize collection efforts for high-value hospitals.</a:t>
-            </a:r>
+              <a:rPr lang="en-US" sz="1350" dirty="0">
+                <a:solidFill>
+                  <a:srgbClr val="1E293B"/>
+                </a:solidFill>
+                <a:latin typeface="Calibri" pitchFamily="34" charset="0"/>
+                <a:ea typeface="Calibri" pitchFamily="34" charset="-122"/>
+                <a:cs typeface="Calibri" pitchFamily="34" charset="-120"/>
+              </a:rPr>
+              <a:t>Review payment recovery monthly.</a:t>
+            </a:r>
+            <a:endParaRPr lang="en-US" sz="1350" dirty="0"/>
           </a:p>
         </p:txBody>
       </p:sp>
@@ -5926,7 +7255,7 @@
 </p:sld>
 </file>
 
-<file path=ppt/slides/slide14.xml><?xml version="1.0" encoding="utf-8"?>
+<file path=ppt/slides/slide15.xml><?xml version="1.0" encoding="utf-8"?>
 <p:sld xmlns:a="http://schemas.openxmlformats.org/drawingml/2006/main" xmlns:r="http://schemas.openxmlformats.org/officeDocument/2006/relationships" xmlns:p="http://schemas.openxmlformats.org/presentationml/2006/main">
   <p:cSld name="Slide 14">
     <p:bg>
@@ -6625,7 +7954,7 @@
 </p:sld>
 </file>
 
-<file path=ppt/slides/slide15.xml><?xml version="1.0" encoding="utf-8"?>
+<file path=ppt/slides/slide16.xml><?xml version="1.0" encoding="utf-8"?>
 <p:sld xmlns:a="http://schemas.openxmlformats.org/drawingml/2006/main" xmlns:r="http://schemas.openxmlformats.org/officeDocument/2006/relationships" xmlns:p="http://schemas.openxmlformats.org/presentationml/2006/main">
   <p:cSld name="Slide 15">
     <p:bg>
@@ -7357,7 +8686,893 @@
 </p:sld>
 </file>
 
-<file path=ppt/slides/slide16.xml><?xml version="1.0" encoding="utf-8"?>
+<file path=ppt/slides/slide17.xml><?xml version="1.0" encoding="utf-8"?>
+<p:sld xmlns:a="http://schemas.openxmlformats.org/drawingml/2006/main" xmlns:r="http://schemas.openxmlformats.org/officeDocument/2006/relationships" xmlns:p="http://schemas.openxmlformats.org/presentationml/2006/main">
+  <p:cSld>
+    <p:spTree>
+      <p:nvGrpSpPr>
+        <p:cNvPr id="1" name="">
+          <a:extLst>
+            <a:ext uri="{FF2B5EF4-FFF2-40B4-BE49-F238E27FC236}">
+              <a16:creationId xmlns:a16="http://schemas.microsoft.com/office/drawing/2014/main" id="{6782CA12-0750-AD76-9117-3109943EDE8E}"/>
+            </a:ext>
+          </a:extLst>
+        </p:cNvPr>
+        <p:cNvGrpSpPr/>
+        <p:nvPr/>
+      </p:nvGrpSpPr>
+      <p:grpSpPr>
+        <a:xfrm>
+          <a:off x="0" y="0"/>
+          <a:ext cx="0" cy="0"/>
+          <a:chOff x="0" y="0"/>
+          <a:chExt cx="0" cy="0"/>
+        </a:xfrm>
+      </p:grpSpPr>
+      <p:sp>
+        <p:nvSpPr>
+          <p:cNvPr id="2" name="Text 0">
+            <a:extLst>
+              <a:ext uri="{FF2B5EF4-FFF2-40B4-BE49-F238E27FC236}">
+                <a16:creationId xmlns:a16="http://schemas.microsoft.com/office/drawing/2014/main" id="{BF280D9B-1CE0-EB53-630F-5586D0072E01}"/>
+              </a:ext>
+            </a:extLst>
+          </p:cNvPr>
+          <p:cNvSpPr/>
+          <p:nvPr/>
+        </p:nvSpPr>
+        <p:spPr>
+          <a:xfrm>
+            <a:off x="548640" y="320040"/>
+            <a:ext cx="7315200" cy="274320"/>
+          </a:xfrm>
+          <a:prstGeom prst="rect">
+            <a:avLst/>
+          </a:prstGeom>
+          <a:noFill/>
+          <a:ln/>
+        </p:spPr>
+        <p:txBody>
+          <a:bodyPr wrap="square" lIns="0" tIns="0" rIns="0" bIns="0" rtlCol="0" anchor="ctr"/>
+          <a:lstStyle/>
+          <a:p>
+            <a:pPr marL="0" indent="0">
+              <a:buNone/>
+            </a:pPr>
+            <a:r>
+              <a:rPr lang="en-US" sz="1200" b="1" kern="0" spc="200" dirty="0">
+                <a:solidFill>
+                  <a:srgbClr val="1C7293"/>
+                </a:solidFill>
+                <a:latin typeface="Calibri" pitchFamily="34" charset="0"/>
+                <a:ea typeface="Calibri" pitchFamily="34" charset="-122"/>
+                <a:cs typeface="Calibri" pitchFamily="34" charset="-120"/>
+              </a:rPr>
+              <a:t>BUSINESS  ANALYST LEARNINGS</a:t>
+            </a:r>
+            <a:endParaRPr lang="en-US" sz="1200" dirty="0"/>
+          </a:p>
+        </p:txBody>
+      </p:sp>
+      <p:sp>
+        <p:nvSpPr>
+          <p:cNvPr id="3" name="Text 1">
+            <a:extLst>
+              <a:ext uri="{FF2B5EF4-FFF2-40B4-BE49-F238E27FC236}">
+                <a16:creationId xmlns:a16="http://schemas.microsoft.com/office/drawing/2014/main" id="{CBED190B-6ECA-D1E4-784E-CD22FEEFFAC7}"/>
+              </a:ext>
+            </a:extLst>
+          </p:cNvPr>
+          <p:cNvSpPr/>
+          <p:nvPr/>
+        </p:nvSpPr>
+        <p:spPr>
+          <a:xfrm>
+            <a:off x="548640" y="566928"/>
+            <a:ext cx="10058400" cy="594360"/>
+          </a:xfrm>
+          <a:prstGeom prst="rect">
+            <a:avLst/>
+          </a:prstGeom>
+          <a:noFill/>
+          <a:ln/>
+        </p:spPr>
+        <p:txBody>
+          <a:bodyPr wrap="square" lIns="0" tIns="0" rIns="0" bIns="0" rtlCol="0" anchor="ctr"/>
+          <a:lstStyle/>
+          <a:p>
+            <a:pPr marL="0" indent="0">
+              <a:buNone/>
+            </a:pPr>
+            <a:r>
+              <a:rPr lang="en-US" sz="3000" b="1" dirty="0">
+                <a:solidFill>
+                  <a:srgbClr val="0B2545"/>
+                </a:solidFill>
+                <a:latin typeface="Cambria" pitchFamily="34" charset="0"/>
+                <a:ea typeface="Cambria" pitchFamily="34" charset="-122"/>
+              </a:rPr>
+              <a:t>Tools and documentation </a:t>
+            </a:r>
+            <a:endParaRPr lang="en-US" sz="3000" dirty="0"/>
+          </a:p>
+        </p:txBody>
+      </p:sp>
+      <p:sp>
+        <p:nvSpPr>
+          <p:cNvPr id="28" name="Text 20">
+            <a:extLst>
+              <a:ext uri="{FF2B5EF4-FFF2-40B4-BE49-F238E27FC236}">
+                <a16:creationId xmlns:a16="http://schemas.microsoft.com/office/drawing/2014/main" id="{E7FBBAD8-A4FE-D796-F95A-46CBA56D9811}"/>
+              </a:ext>
+            </a:extLst>
+          </p:cNvPr>
+          <p:cNvSpPr/>
+          <p:nvPr/>
+        </p:nvSpPr>
+        <p:spPr>
+          <a:xfrm>
+            <a:off x="11548872" y="320040"/>
+            <a:ext cx="365760" cy="274320"/>
+          </a:xfrm>
+          <a:prstGeom prst="rect">
+            <a:avLst/>
+          </a:prstGeom>
+          <a:noFill/>
+          <a:ln/>
+        </p:spPr>
+        <p:txBody>
+          <a:bodyPr wrap="square" rtlCol="0" anchor="ctr"/>
+          <a:lstStyle/>
+          <a:p>
+            <a:pPr marL="0" indent="0" algn="r">
+              <a:buNone/>
+            </a:pPr>
+            <a:r>
+              <a:rPr lang="en-US" sz="1000" dirty="0">
+                <a:solidFill>
+                  <a:srgbClr val="5B6B7A"/>
+                </a:solidFill>
+                <a:latin typeface="Calibri" pitchFamily="34" charset="0"/>
+                <a:ea typeface="Calibri" pitchFamily="34" charset="-122"/>
+                <a:cs typeface="Calibri" pitchFamily="34" charset="-120"/>
+              </a:rPr>
+              <a:t>5</a:t>
+            </a:r>
+            <a:endParaRPr lang="en-US" sz="1000" dirty="0"/>
+          </a:p>
+        </p:txBody>
+      </p:sp>
+      <p:sp>
+        <p:nvSpPr>
+          <p:cNvPr id="31" name="Rectangle: Rounded Corners 30">
+            <a:extLst>
+              <a:ext uri="{FF2B5EF4-FFF2-40B4-BE49-F238E27FC236}">
+                <a16:creationId xmlns:a16="http://schemas.microsoft.com/office/drawing/2014/main" id="{BC6CEF29-9A65-E8CB-D956-770D9C8E75C4}"/>
+              </a:ext>
+            </a:extLst>
+          </p:cNvPr>
+          <p:cNvSpPr/>
+          <p:nvPr/>
+        </p:nvSpPr>
+        <p:spPr>
+          <a:xfrm>
+            <a:off x="538169" y="1334039"/>
+            <a:ext cx="5431930" cy="1136024"/>
+          </a:xfrm>
+          <a:prstGeom prst="roundRect">
+            <a:avLst/>
+          </a:prstGeom>
+          <a:solidFill>
+            <a:schemeClr val="bg2"/>
+          </a:solidFill>
+        </p:spPr>
+        <p:style>
+          <a:lnRef idx="2">
+            <a:schemeClr val="accent6"/>
+          </a:lnRef>
+          <a:fillRef idx="1">
+            <a:schemeClr val="lt1"/>
+          </a:fillRef>
+          <a:effectRef idx="0">
+            <a:schemeClr val="accent6"/>
+          </a:effectRef>
+          <a:fontRef idx="minor">
+            <a:schemeClr val="dk1"/>
+          </a:fontRef>
+        </p:style>
+        <p:txBody>
+          <a:bodyPr rtlCol="0" anchor="ctr"/>
+          <a:lstStyle/>
+          <a:p>
+            <a:pPr marL="342900" indent="-342900">
+              <a:buFont typeface="Wingdings" panose="05000000000000000000" pitchFamily="2" charset="2"/>
+              <a:buChar char="v"/>
+            </a:pPr>
+            <a:r>
+              <a:rPr lang="en-US" dirty="0">
+                <a:ln w="0"/>
+                <a:solidFill>
+                  <a:schemeClr val="accent1"/>
+                </a:solidFill>
+                <a:effectLst>
+                  <a:outerShdw blurRad="38100" dist="25400" dir="5400000" algn="ctr" rotWithShape="0">
+                    <a:srgbClr val="6E747A">
+                      <a:alpha val="43000"/>
+                    </a:srgbClr>
+                  </a:outerShdw>
+                </a:effectLst>
+              </a:rPr>
+              <a:t>Understood business problems and converted them into reporting requirements.</a:t>
+            </a:r>
+            <a:br>
+              <a:rPr lang="en-US" dirty="0">
+                <a:ln w="0"/>
+                <a:solidFill>
+                  <a:schemeClr val="accent1"/>
+                </a:solidFill>
+                <a:effectLst>
+                  <a:outerShdw blurRad="38100" dist="25400" dir="5400000" algn="ctr" rotWithShape="0">
+                    <a:srgbClr val="6E747A">
+                      <a:alpha val="43000"/>
+                    </a:srgbClr>
+                  </a:outerShdw>
+                </a:effectLst>
+              </a:rPr>
+            </a:br>
+            <a:endParaRPr lang="en-IN" dirty="0">
+              <a:ln w="0"/>
+              <a:solidFill>
+                <a:schemeClr val="accent1"/>
+              </a:solidFill>
+              <a:effectLst>
+                <a:outerShdw blurRad="38100" dist="25400" dir="5400000" algn="ctr" rotWithShape="0">
+                  <a:srgbClr val="6E747A">
+                    <a:alpha val="43000"/>
+                  </a:srgbClr>
+                </a:outerShdw>
+              </a:effectLst>
+            </a:endParaRPr>
+          </a:p>
+        </p:txBody>
+      </p:sp>
+      <p:sp>
+        <p:nvSpPr>
+          <p:cNvPr id="32" name="Rectangle: Rounded Corners 31">
+            <a:extLst>
+              <a:ext uri="{FF2B5EF4-FFF2-40B4-BE49-F238E27FC236}">
+                <a16:creationId xmlns:a16="http://schemas.microsoft.com/office/drawing/2014/main" id="{B0DB9177-7756-B9B2-4E0E-E2CC1580F331}"/>
+              </a:ext>
+            </a:extLst>
+          </p:cNvPr>
+          <p:cNvSpPr/>
+          <p:nvPr/>
+        </p:nvSpPr>
+        <p:spPr>
+          <a:xfrm>
+            <a:off x="6190488" y="1338968"/>
+            <a:ext cx="5452872" cy="1136024"/>
+          </a:xfrm>
+          <a:prstGeom prst="roundRect">
+            <a:avLst/>
+          </a:prstGeom>
+          <a:solidFill>
+            <a:schemeClr val="bg2"/>
+          </a:solidFill>
+        </p:spPr>
+        <p:style>
+          <a:lnRef idx="2">
+            <a:schemeClr val="accent6"/>
+          </a:lnRef>
+          <a:fillRef idx="1">
+            <a:schemeClr val="lt1"/>
+          </a:fillRef>
+          <a:effectRef idx="0">
+            <a:schemeClr val="accent6"/>
+          </a:effectRef>
+          <a:fontRef idx="minor">
+            <a:schemeClr val="dk1"/>
+          </a:fontRef>
+        </p:style>
+        <p:txBody>
+          <a:bodyPr rtlCol="0" anchor="ctr"/>
+          <a:lstStyle/>
+          <a:p>
+            <a:pPr marL="285750" indent="-285750">
+              <a:buFont typeface="Wingdings" panose="05000000000000000000" pitchFamily="2" charset="2"/>
+              <a:buChar char="v"/>
+            </a:pPr>
+            <a:r>
+              <a:rPr lang="en-US" dirty="0">
+                <a:ln w="0"/>
+                <a:solidFill>
+                  <a:schemeClr val="accent1"/>
+                </a:solidFill>
+                <a:effectLst>
+                  <a:outerShdw blurRad="38100" dist="25400" dir="5400000" algn="ctr" rotWithShape="0">
+                    <a:srgbClr val="6E747A">
+                      <a:alpha val="43000"/>
+                    </a:srgbClr>
+                  </a:outerShdw>
+                </a:effectLst>
+              </a:rPr>
+              <a:t>Prepared BRD and FRD documents based on stakeholder needs.</a:t>
+            </a:r>
+            <a:br>
+              <a:rPr lang="en-US" dirty="0">
+                <a:ln w="0"/>
+                <a:solidFill>
+                  <a:schemeClr val="accent1"/>
+                </a:solidFill>
+                <a:effectLst>
+                  <a:outerShdw blurRad="38100" dist="25400" dir="5400000" algn="ctr" rotWithShape="0">
+                    <a:srgbClr val="6E747A">
+                      <a:alpha val="43000"/>
+                    </a:srgbClr>
+                  </a:outerShdw>
+                </a:effectLst>
+              </a:rPr>
+            </a:br>
+            <a:endParaRPr lang="en-IN" dirty="0">
+              <a:ln w="0"/>
+              <a:solidFill>
+                <a:schemeClr val="accent1"/>
+              </a:solidFill>
+              <a:effectLst>
+                <a:outerShdw blurRad="38100" dist="25400" dir="5400000" algn="ctr" rotWithShape="0">
+                  <a:srgbClr val="6E747A">
+                    <a:alpha val="43000"/>
+                  </a:srgbClr>
+                </a:outerShdw>
+              </a:effectLst>
+            </a:endParaRPr>
+          </a:p>
+        </p:txBody>
+      </p:sp>
+      <p:sp>
+        <p:nvSpPr>
+          <p:cNvPr id="33" name="Rectangle: Rounded Corners 32">
+            <a:extLst>
+              <a:ext uri="{FF2B5EF4-FFF2-40B4-BE49-F238E27FC236}">
+                <a16:creationId xmlns:a16="http://schemas.microsoft.com/office/drawing/2014/main" id="{22EF5043-9169-FCA3-02AE-9EBC3813906A}"/>
+              </a:ext>
+            </a:extLst>
+          </p:cNvPr>
+          <p:cNvSpPr/>
+          <p:nvPr/>
+        </p:nvSpPr>
+        <p:spPr>
+          <a:xfrm>
+            <a:off x="527698" y="2707589"/>
+            <a:ext cx="5452872" cy="1136024"/>
+          </a:xfrm>
+          <a:prstGeom prst="roundRect">
+            <a:avLst/>
+          </a:prstGeom>
+          <a:solidFill>
+            <a:schemeClr val="bg2"/>
+          </a:solidFill>
+        </p:spPr>
+        <p:style>
+          <a:lnRef idx="2">
+            <a:schemeClr val="accent6"/>
+          </a:lnRef>
+          <a:fillRef idx="1">
+            <a:schemeClr val="lt1"/>
+          </a:fillRef>
+          <a:effectRef idx="0">
+            <a:schemeClr val="accent6"/>
+          </a:effectRef>
+          <a:fontRef idx="minor">
+            <a:schemeClr val="dk1"/>
+          </a:fontRef>
+        </p:style>
+        <p:txBody>
+          <a:bodyPr rtlCol="0" anchor="ctr"/>
+          <a:lstStyle/>
+          <a:p>
+            <a:pPr marL="342900" indent="-342900">
+              <a:buFont typeface="Wingdings" panose="05000000000000000000" pitchFamily="2" charset="2"/>
+              <a:buChar char="v"/>
+            </a:pPr>
+            <a:r>
+              <a:rPr lang="en-US" dirty="0">
+                <a:ln w="0"/>
+                <a:solidFill>
+                  <a:schemeClr val="accent1"/>
+                </a:solidFill>
+                <a:effectLst>
+                  <a:outerShdw blurRad="38100" dist="25400" dir="5400000" algn="ctr" rotWithShape="0">
+                    <a:srgbClr val="6E747A">
+                      <a:alpha val="43000"/>
+                    </a:srgbClr>
+                  </a:outerShdw>
+                </a:effectLst>
+              </a:rPr>
+              <a:t>Created user stories and acceptance criteria.</a:t>
+            </a:r>
+            <a:br>
+              <a:rPr lang="en-US" dirty="0">
+                <a:ln w="0"/>
+                <a:solidFill>
+                  <a:schemeClr val="accent1"/>
+                </a:solidFill>
+                <a:effectLst>
+                  <a:outerShdw blurRad="38100" dist="25400" dir="5400000" algn="ctr" rotWithShape="0">
+                    <a:srgbClr val="6E747A">
+                      <a:alpha val="43000"/>
+                    </a:srgbClr>
+                  </a:outerShdw>
+                </a:effectLst>
+              </a:rPr>
+            </a:br>
+            <a:endParaRPr lang="en-IN" dirty="0">
+              <a:ln w="0"/>
+              <a:solidFill>
+                <a:schemeClr val="accent1"/>
+              </a:solidFill>
+              <a:effectLst>
+                <a:outerShdw blurRad="38100" dist="25400" dir="5400000" algn="ctr" rotWithShape="0">
+                  <a:srgbClr val="6E747A">
+                    <a:alpha val="43000"/>
+                  </a:srgbClr>
+                </a:outerShdw>
+              </a:effectLst>
+            </a:endParaRPr>
+          </a:p>
+        </p:txBody>
+      </p:sp>
+      <p:sp>
+        <p:nvSpPr>
+          <p:cNvPr id="34" name="Rectangle: Rounded Corners 33">
+            <a:extLst>
+              <a:ext uri="{FF2B5EF4-FFF2-40B4-BE49-F238E27FC236}">
+                <a16:creationId xmlns:a16="http://schemas.microsoft.com/office/drawing/2014/main" id="{86B2CB9A-B114-5F58-B489-07900987A25F}"/>
+              </a:ext>
+            </a:extLst>
+          </p:cNvPr>
+          <p:cNvSpPr/>
+          <p:nvPr/>
+        </p:nvSpPr>
+        <p:spPr>
+          <a:xfrm>
+            <a:off x="6194935" y="2707589"/>
+            <a:ext cx="5452872" cy="1136024"/>
+          </a:xfrm>
+          <a:prstGeom prst="roundRect">
+            <a:avLst/>
+          </a:prstGeom>
+          <a:solidFill>
+            <a:schemeClr val="bg2"/>
+          </a:solidFill>
+        </p:spPr>
+        <p:style>
+          <a:lnRef idx="2">
+            <a:schemeClr val="accent6"/>
+          </a:lnRef>
+          <a:fillRef idx="1">
+            <a:schemeClr val="lt1"/>
+          </a:fillRef>
+          <a:effectRef idx="0">
+            <a:schemeClr val="accent6"/>
+          </a:effectRef>
+          <a:fontRef idx="minor">
+            <a:schemeClr val="dk1"/>
+          </a:fontRef>
+        </p:style>
+        <p:txBody>
+          <a:bodyPr rtlCol="0" anchor="ctr"/>
+          <a:lstStyle/>
+          <a:p>
+            <a:pPr marL="285750" indent="-285750">
+              <a:buFont typeface="Wingdings" panose="05000000000000000000" pitchFamily="2" charset="2"/>
+              <a:buChar char="v"/>
+            </a:pPr>
+            <a:r>
+              <a:rPr lang="en-IN" dirty="0">
+                <a:ln w="0"/>
+                <a:solidFill>
+                  <a:schemeClr val="accent1"/>
+                </a:solidFill>
+                <a:effectLst>
+                  <a:outerShdw blurRad="38100" dist="25400" dir="5400000" algn="ctr" rotWithShape="0">
+                    <a:srgbClr val="6E747A">
+                      <a:alpha val="43000"/>
+                    </a:srgbClr>
+                  </a:outerShdw>
+                </a:effectLst>
+              </a:rPr>
+              <a:t>Designed an ER Diagram and data model.</a:t>
+            </a:r>
+            <a:br>
+              <a:rPr lang="en-IN" dirty="0">
+                <a:ln w="0"/>
+                <a:solidFill>
+                  <a:schemeClr val="accent1"/>
+                </a:solidFill>
+                <a:effectLst>
+                  <a:outerShdw blurRad="38100" dist="25400" dir="5400000" algn="ctr" rotWithShape="0">
+                    <a:srgbClr val="6E747A">
+                      <a:alpha val="43000"/>
+                    </a:srgbClr>
+                  </a:outerShdw>
+                </a:effectLst>
+              </a:rPr>
+            </a:br>
+            <a:endParaRPr lang="en-IN" dirty="0">
+              <a:ln w="0"/>
+              <a:solidFill>
+                <a:schemeClr val="accent1"/>
+              </a:solidFill>
+              <a:effectLst>
+                <a:outerShdw blurRad="38100" dist="25400" dir="5400000" algn="ctr" rotWithShape="0">
+                  <a:srgbClr val="6E747A">
+                    <a:alpha val="43000"/>
+                  </a:srgbClr>
+                </a:outerShdw>
+              </a:effectLst>
+            </a:endParaRPr>
+          </a:p>
+        </p:txBody>
+      </p:sp>
+      <p:sp>
+        <p:nvSpPr>
+          <p:cNvPr id="35" name="Rectangle: Rounded Corners 34">
+            <a:extLst>
+              <a:ext uri="{FF2B5EF4-FFF2-40B4-BE49-F238E27FC236}">
+                <a16:creationId xmlns:a16="http://schemas.microsoft.com/office/drawing/2014/main" id="{F3F39CE1-F7F1-2CAA-A8FE-B5BC38FAE3EF}"/>
+              </a:ext>
+            </a:extLst>
+          </p:cNvPr>
+          <p:cNvSpPr/>
+          <p:nvPr/>
+        </p:nvSpPr>
+        <p:spPr>
+          <a:xfrm>
+            <a:off x="548640" y="4145511"/>
+            <a:ext cx="5452872" cy="1136024"/>
+          </a:xfrm>
+          <a:prstGeom prst="roundRect">
+            <a:avLst/>
+          </a:prstGeom>
+          <a:solidFill>
+            <a:schemeClr val="bg2"/>
+          </a:solidFill>
+        </p:spPr>
+        <p:style>
+          <a:lnRef idx="2">
+            <a:schemeClr val="accent6"/>
+          </a:lnRef>
+          <a:fillRef idx="1">
+            <a:schemeClr val="lt1"/>
+          </a:fillRef>
+          <a:effectRef idx="0">
+            <a:schemeClr val="accent6"/>
+          </a:effectRef>
+          <a:fontRef idx="minor">
+            <a:schemeClr val="dk1"/>
+          </a:fontRef>
+        </p:style>
+        <p:txBody>
+          <a:bodyPr rtlCol="0" anchor="ctr"/>
+          <a:lstStyle/>
+          <a:p>
+            <a:pPr marL="285750" indent="-285750">
+              <a:buFont typeface="Wingdings" panose="05000000000000000000" pitchFamily="2" charset="2"/>
+              <a:buChar char="v"/>
+            </a:pPr>
+            <a:r>
+              <a:rPr lang="en-US" dirty="0">
+                <a:ln w="0"/>
+                <a:solidFill>
+                  <a:schemeClr val="accent1"/>
+                </a:solidFill>
+                <a:effectLst>
+                  <a:outerShdw blurRad="38100" dist="25400" dir="5400000" algn="ctr" rotWithShape="0">
+                    <a:srgbClr val="6E747A">
+                      <a:alpha val="43000"/>
+                    </a:srgbClr>
+                  </a:outerShdw>
+                </a:effectLst>
+              </a:rPr>
+              <a:t>Used SQL to answer business questions.</a:t>
+            </a:r>
+            <a:br>
+              <a:rPr lang="en-US" dirty="0">
+                <a:ln w="0"/>
+                <a:solidFill>
+                  <a:schemeClr val="accent1"/>
+                </a:solidFill>
+                <a:effectLst>
+                  <a:outerShdw blurRad="38100" dist="25400" dir="5400000" algn="ctr" rotWithShape="0">
+                    <a:srgbClr val="6E747A">
+                      <a:alpha val="43000"/>
+                    </a:srgbClr>
+                  </a:outerShdw>
+                </a:effectLst>
+              </a:rPr>
+            </a:br>
+            <a:endParaRPr lang="en-IN" dirty="0">
+              <a:ln w="0"/>
+              <a:solidFill>
+                <a:schemeClr val="accent1"/>
+              </a:solidFill>
+              <a:effectLst>
+                <a:outerShdw blurRad="38100" dist="25400" dir="5400000" algn="ctr" rotWithShape="0">
+                  <a:srgbClr val="6E747A">
+                    <a:alpha val="43000"/>
+                  </a:srgbClr>
+                </a:outerShdw>
+              </a:effectLst>
+            </a:endParaRPr>
+          </a:p>
+        </p:txBody>
+      </p:sp>
+      <p:sp>
+        <p:nvSpPr>
+          <p:cNvPr id="36" name="Rectangle: Rounded Corners 35">
+            <a:extLst>
+              <a:ext uri="{FF2B5EF4-FFF2-40B4-BE49-F238E27FC236}">
+                <a16:creationId xmlns:a16="http://schemas.microsoft.com/office/drawing/2014/main" id="{4E385336-B2D1-E06D-5395-22FDD150674F}"/>
+              </a:ext>
+            </a:extLst>
+          </p:cNvPr>
+          <p:cNvSpPr/>
+          <p:nvPr/>
+        </p:nvSpPr>
+        <p:spPr>
+          <a:xfrm>
+            <a:off x="6190488" y="4145511"/>
+            <a:ext cx="5452872" cy="1136024"/>
+          </a:xfrm>
+          <a:prstGeom prst="roundRect">
+            <a:avLst/>
+          </a:prstGeom>
+          <a:solidFill>
+            <a:schemeClr val="bg2"/>
+          </a:solidFill>
+        </p:spPr>
+        <p:style>
+          <a:lnRef idx="2">
+            <a:schemeClr val="accent6"/>
+          </a:lnRef>
+          <a:fillRef idx="1">
+            <a:schemeClr val="lt1"/>
+          </a:fillRef>
+          <a:effectRef idx="0">
+            <a:schemeClr val="accent6"/>
+          </a:effectRef>
+          <a:fontRef idx="minor">
+            <a:schemeClr val="dk1"/>
+          </a:fontRef>
+        </p:style>
+        <p:txBody>
+          <a:bodyPr rtlCol="0" anchor="ctr"/>
+          <a:lstStyle/>
+          <a:p>
+            <a:pPr marL="285750" indent="-285750">
+              <a:buFont typeface="Wingdings" panose="05000000000000000000" pitchFamily="2" charset="2"/>
+              <a:buChar char="v"/>
+            </a:pPr>
+            <a:r>
+              <a:rPr lang="en-US" dirty="0">
+                <a:ln w="0"/>
+                <a:solidFill>
+                  <a:schemeClr val="accent1"/>
+                </a:solidFill>
+                <a:effectLst>
+                  <a:outerShdw blurRad="38100" dist="25400" dir="5400000" algn="ctr" rotWithShape="0">
+                    <a:srgbClr val="6E747A">
+                      <a:alpha val="43000"/>
+                    </a:srgbClr>
+                  </a:outerShdw>
+                </a:effectLst>
+              </a:rPr>
+              <a:t>Built Power BI dashboards for management reporting.</a:t>
+            </a:r>
+            <a:br>
+              <a:rPr lang="en-US" dirty="0">
+                <a:ln w="0"/>
+                <a:solidFill>
+                  <a:schemeClr val="accent1"/>
+                </a:solidFill>
+                <a:effectLst>
+                  <a:outerShdw blurRad="38100" dist="25400" dir="5400000" algn="ctr" rotWithShape="0">
+                    <a:srgbClr val="6E747A">
+                      <a:alpha val="43000"/>
+                    </a:srgbClr>
+                  </a:outerShdw>
+                </a:effectLst>
+              </a:rPr>
+            </a:br>
+            <a:endParaRPr lang="en-IN" dirty="0">
+              <a:ln w="0"/>
+              <a:solidFill>
+                <a:schemeClr val="accent1"/>
+              </a:solidFill>
+              <a:effectLst>
+                <a:outerShdw blurRad="38100" dist="25400" dir="5400000" algn="ctr" rotWithShape="0">
+                  <a:srgbClr val="6E747A">
+                    <a:alpha val="43000"/>
+                  </a:srgbClr>
+                </a:outerShdw>
+              </a:effectLst>
+            </a:endParaRPr>
+          </a:p>
+        </p:txBody>
+      </p:sp>
+      <p:sp>
+        <p:nvSpPr>
+          <p:cNvPr id="37" name="Rectangle: Rounded Corners 36">
+            <a:extLst>
+              <a:ext uri="{FF2B5EF4-FFF2-40B4-BE49-F238E27FC236}">
+                <a16:creationId xmlns:a16="http://schemas.microsoft.com/office/drawing/2014/main" id="{443FC1B8-BDDE-D5CB-CD11-EB723E0347AF}"/>
+              </a:ext>
+            </a:extLst>
+          </p:cNvPr>
+          <p:cNvSpPr/>
+          <p:nvPr/>
+        </p:nvSpPr>
+        <p:spPr>
+          <a:xfrm>
+            <a:off x="527698" y="5535637"/>
+            <a:ext cx="5452872" cy="1136024"/>
+          </a:xfrm>
+          <a:prstGeom prst="roundRect">
+            <a:avLst/>
+          </a:prstGeom>
+          <a:solidFill>
+            <a:schemeClr val="bg2"/>
+          </a:solidFill>
+        </p:spPr>
+        <p:style>
+          <a:lnRef idx="2">
+            <a:schemeClr val="accent6"/>
+          </a:lnRef>
+          <a:fillRef idx="1">
+            <a:schemeClr val="lt1"/>
+          </a:fillRef>
+          <a:effectRef idx="0">
+            <a:schemeClr val="accent6"/>
+          </a:effectRef>
+          <a:fontRef idx="minor">
+            <a:schemeClr val="dk1"/>
+          </a:fontRef>
+        </p:style>
+        <p:txBody>
+          <a:bodyPr rtlCol="0" anchor="ctr"/>
+          <a:lstStyle/>
+          <a:p>
+            <a:pPr marL="285750" indent="-285750">
+              <a:buFont typeface="Wingdings" panose="05000000000000000000" pitchFamily="2" charset="2"/>
+              <a:buChar char="v"/>
+            </a:pPr>
+            <a:r>
+              <a:rPr lang="en-US" dirty="0">
+                <a:ln w="0"/>
+                <a:solidFill>
+                  <a:schemeClr val="accent1"/>
+                </a:solidFill>
+                <a:effectLst>
+                  <a:outerShdw blurRad="38100" dist="25400" dir="5400000" algn="ctr" rotWithShape="0">
+                    <a:srgbClr val="6E747A">
+                      <a:alpha val="43000"/>
+                    </a:srgbClr>
+                  </a:outerShdw>
+                </a:effectLst>
+              </a:rPr>
+              <a:t>Generated insights and recommendations to support decision making.</a:t>
+            </a:r>
+            <a:br>
+              <a:rPr lang="en-US" dirty="0">
+                <a:ln w="0"/>
+                <a:solidFill>
+                  <a:schemeClr val="accent1"/>
+                </a:solidFill>
+                <a:effectLst>
+                  <a:outerShdw blurRad="38100" dist="25400" dir="5400000" algn="ctr" rotWithShape="0">
+                    <a:srgbClr val="6E747A">
+                      <a:alpha val="43000"/>
+                    </a:srgbClr>
+                  </a:outerShdw>
+                </a:effectLst>
+              </a:rPr>
+            </a:br>
+            <a:endParaRPr lang="en-IN" dirty="0">
+              <a:ln w="0"/>
+              <a:solidFill>
+                <a:schemeClr val="accent1"/>
+              </a:solidFill>
+              <a:effectLst>
+                <a:outerShdw blurRad="38100" dist="25400" dir="5400000" algn="ctr" rotWithShape="0">
+                  <a:srgbClr val="6E747A">
+                    <a:alpha val="43000"/>
+                  </a:srgbClr>
+                </a:outerShdw>
+              </a:effectLst>
+            </a:endParaRPr>
+          </a:p>
+        </p:txBody>
+      </p:sp>
+      <p:sp>
+        <p:nvSpPr>
+          <p:cNvPr id="38" name="Rectangle: Rounded Corners 37">
+            <a:extLst>
+              <a:ext uri="{FF2B5EF4-FFF2-40B4-BE49-F238E27FC236}">
+                <a16:creationId xmlns:a16="http://schemas.microsoft.com/office/drawing/2014/main" id="{2EFEFFF5-C629-4326-245A-D44F2AFEB3F2}"/>
+              </a:ext>
+            </a:extLst>
+          </p:cNvPr>
+          <p:cNvSpPr/>
+          <p:nvPr/>
+        </p:nvSpPr>
+        <p:spPr>
+          <a:xfrm>
+            <a:off x="6194935" y="5530795"/>
+            <a:ext cx="5448425" cy="1136024"/>
+          </a:xfrm>
+          <a:prstGeom prst="roundRect">
+            <a:avLst/>
+          </a:prstGeom>
+          <a:solidFill>
+            <a:schemeClr val="bg2"/>
+          </a:solidFill>
+        </p:spPr>
+        <p:style>
+          <a:lnRef idx="2">
+            <a:schemeClr val="accent6"/>
+          </a:lnRef>
+          <a:fillRef idx="1">
+            <a:schemeClr val="lt1"/>
+          </a:fillRef>
+          <a:effectRef idx="0">
+            <a:schemeClr val="accent6"/>
+          </a:effectRef>
+          <a:fontRef idx="minor">
+            <a:schemeClr val="dk1"/>
+          </a:fontRef>
+        </p:style>
+        <p:txBody>
+          <a:bodyPr rtlCol="0" anchor="ctr"/>
+          <a:lstStyle/>
+          <a:p>
+            <a:pPr marL="285750" indent="-285750">
+              <a:buFont typeface="Wingdings" panose="05000000000000000000" pitchFamily="2" charset="2"/>
+              <a:buChar char="v"/>
+            </a:pPr>
+            <a:r>
+              <a:rPr lang="en-US" dirty="0">
+                <a:ln w="0"/>
+                <a:solidFill>
+                  <a:schemeClr val="accent1"/>
+                </a:solidFill>
+                <a:effectLst>
+                  <a:outerShdw blurRad="38100" dist="25400" dir="5400000" algn="ctr" rotWithShape="0">
+                    <a:srgbClr val="6E747A">
+                      <a:alpha val="43000"/>
+                    </a:srgbClr>
+                  </a:outerShdw>
+                </a:effectLst>
+              </a:rPr>
+              <a:t>Improved understanding of Business Analysis, SQL, and Power BI.</a:t>
+            </a:r>
+          </a:p>
+        </p:txBody>
+      </p:sp>
+    </p:spTree>
+    <p:extLst>
+      <p:ext uri="{BB962C8B-B14F-4D97-AF65-F5344CB8AC3E}">
+        <p14:creationId xmlns:p14="http://schemas.microsoft.com/office/powerpoint/2010/main" val="1217780557"/>
+      </p:ext>
+    </p:extLst>
+  </p:cSld>
+  <p:clrMapOvr>
+    <a:masterClrMapping/>
+  </p:clrMapOvr>
+</p:sld>
+</file>
+
+<file path=ppt/slides/slide18.xml><?xml version="1.0" encoding="utf-8"?>
 <p:sld xmlns:a="http://schemas.openxmlformats.org/drawingml/2006/main" xmlns:r="http://schemas.openxmlformats.org/officeDocument/2006/relationships" xmlns:p="http://schemas.openxmlformats.org/presentationml/2006/main">
   <p:cSld name="Slide 16">
     <p:bg>
@@ -12631,9 +14846,6 @@
           <a:bodyPr wrap="square" lIns="0" tIns="0" rIns="0" bIns="0" rtlCol="0" anchor="ctr"/>
           <a:lstStyle/>
           <a:p>
-            <a:pPr marL="0" indent="0">
-              <a:buNone/>
-            </a:pPr>
             <a:r>
               <a:rPr lang="en-US" sz="3000" b="1" dirty="0">
                 <a:solidFill>
@@ -12643,7 +14855,7 @@
                 <a:ea typeface="Cambria" pitchFamily="34" charset="-122"/>
                 <a:cs typeface="Cambria" pitchFamily="34" charset="-120"/>
               </a:rPr>
-              <a:t>My Business Analysist  Approach</a:t>
+              <a:t>My Business Analyst Approach</a:t>
             </a:r>
             <a:endParaRPr lang="en-US" sz="3000" dirty="0"/>
           </a:p>
@@ -15095,9 +17307,7 @@
           <a:bodyPr wrap="square" lIns="0" tIns="0" rIns="0" bIns="0" rtlCol="0" anchor="ctr"/>
           <a:lstStyle/>
           <a:p>
-            <a:pPr marL="0" indent="0">
-              <a:buNone/>
-            </a:pPr>
+            <a:pPr algn="ctr"/>
             <a:r>
               <a:rPr lang="en-US" sz="3000" b="1" dirty="0">
                 <a:solidFill>
@@ -15107,7 +17317,7 @@
                 <a:ea typeface="Cambria" pitchFamily="34" charset="-122"/>
                 <a:cs typeface="Cambria" pitchFamily="34" charset="-120"/>
               </a:rPr>
-              <a:t>ER Diagram : How the Data is Connects ?</a:t>
+              <a:t>ER Diagram : Data Model Overview</a:t>
             </a:r>
             <a:endParaRPr lang="en-US" sz="3000" dirty="0"/>
           </a:p>
@@ -15818,10 +18028,10 @@
       </p:sp>
       <p:pic>
         <p:nvPicPr>
-          <p:cNvPr id="35" name="Picture 34">
+          <p:cNvPr id="5" name="Picture 4">
             <a:extLst>
               <a:ext uri="{FF2B5EF4-FFF2-40B4-BE49-F238E27FC236}">
-                <a16:creationId xmlns:a16="http://schemas.microsoft.com/office/drawing/2014/main" id="{F8F69E9A-A14B-A247-B2D3-2502AE66E7B1}"/>
+                <a16:creationId xmlns:a16="http://schemas.microsoft.com/office/drawing/2014/main" id="{EA00B226-187B-1771-D0CA-0EA1EC56F451}"/>
               </a:ext>
             </a:extLst>
           </p:cNvPr>
@@ -15838,8 +18048,8 @@
         </p:blipFill>
         <p:spPr>
           <a:xfrm>
-            <a:off x="33707" y="1188112"/>
-            <a:ext cx="12158293" cy="5669887"/>
+            <a:off x="374073" y="1161288"/>
+            <a:ext cx="10986653" cy="5564800"/>
           </a:xfrm>
           <a:prstGeom prst="rect">
             <a:avLst/>
